--- a/投影片/民意與調查Week3.pptx
+++ b/投影片/民意與調查Week3.pptx
@@ -5,10 +5,10 @@
     <p:sldMasterId id="2147483655" r:id="rId1"/>
   </p:sldMasterIdLst>
   <p:notesMasterIdLst>
-    <p:notesMasterId r:id="rId44"/>
+    <p:notesMasterId r:id="rId45"/>
   </p:notesMasterIdLst>
   <p:handoutMasterIdLst>
-    <p:handoutMasterId r:id="rId45"/>
+    <p:handoutMasterId r:id="rId46"/>
   </p:handoutMasterIdLst>
   <p:sldIdLst>
     <p:sldId id="256" r:id="rId2"/>
@@ -29,30 +29,31 @@
     <p:sldId id="355" r:id="rId17"/>
     <p:sldId id="357" r:id="rId18"/>
     <p:sldId id="358" r:id="rId19"/>
-    <p:sldId id="359" r:id="rId20"/>
-    <p:sldId id="346" r:id="rId21"/>
-    <p:sldId id="361" r:id="rId22"/>
-    <p:sldId id="336" r:id="rId23"/>
-    <p:sldId id="337" r:id="rId24"/>
-    <p:sldId id="343" r:id="rId25"/>
-    <p:sldId id="333" r:id="rId26"/>
-    <p:sldId id="334" r:id="rId27"/>
-    <p:sldId id="360" r:id="rId28"/>
-    <p:sldId id="366" r:id="rId29"/>
-    <p:sldId id="331" r:id="rId30"/>
-    <p:sldId id="371" r:id="rId31"/>
-    <p:sldId id="367" r:id="rId32"/>
-    <p:sldId id="368" r:id="rId33"/>
-    <p:sldId id="369" r:id="rId34"/>
-    <p:sldId id="370" r:id="rId35"/>
-    <p:sldId id="363" r:id="rId36"/>
-    <p:sldId id="372" r:id="rId37"/>
-    <p:sldId id="330" r:id="rId38"/>
-    <p:sldId id="373" r:id="rId39"/>
-    <p:sldId id="374" r:id="rId40"/>
-    <p:sldId id="335" r:id="rId41"/>
-    <p:sldId id="325" r:id="rId42"/>
-    <p:sldId id="326" r:id="rId43"/>
+    <p:sldId id="375" r:id="rId20"/>
+    <p:sldId id="359" r:id="rId21"/>
+    <p:sldId id="346" r:id="rId22"/>
+    <p:sldId id="361" r:id="rId23"/>
+    <p:sldId id="336" r:id="rId24"/>
+    <p:sldId id="337" r:id="rId25"/>
+    <p:sldId id="343" r:id="rId26"/>
+    <p:sldId id="333" r:id="rId27"/>
+    <p:sldId id="334" r:id="rId28"/>
+    <p:sldId id="360" r:id="rId29"/>
+    <p:sldId id="366" r:id="rId30"/>
+    <p:sldId id="331" r:id="rId31"/>
+    <p:sldId id="371" r:id="rId32"/>
+    <p:sldId id="367" r:id="rId33"/>
+    <p:sldId id="368" r:id="rId34"/>
+    <p:sldId id="369" r:id="rId35"/>
+    <p:sldId id="370" r:id="rId36"/>
+    <p:sldId id="363" r:id="rId37"/>
+    <p:sldId id="372" r:id="rId38"/>
+    <p:sldId id="330" r:id="rId39"/>
+    <p:sldId id="376" r:id="rId40"/>
+    <p:sldId id="373" r:id="rId41"/>
+    <p:sldId id="374" r:id="rId42"/>
+    <p:sldId id="377" r:id="rId43"/>
+    <p:sldId id="335" r:id="rId44"/>
   </p:sldIdLst>
   <p:sldSz cx="9144000" cy="6858000" type="screen4x3"/>
   <p:notesSz cx="6858000" cy="9144000"/>
@@ -7380,26 +7381,30 @@
           <a:p>
             <a:pPr eaLnBrk="1" hangingPunct="1"/>
             <a:r>
-              <a:rPr lang="zh-TW" altLang="en-US">
+              <a:rPr lang="zh-TW" altLang="en-US" dirty="0">
                 <a:latin typeface="Arial Narrow" panose="020B0604020202020204" pitchFamily="34" charset="0"/>
                 <a:ea typeface="SimSun" panose="02010600030101010101" pitchFamily="2" charset="-122"/>
               </a:rPr>
               <a:t>蔡佳泓</a:t>
             </a:r>
+            <a:endParaRPr lang="en-US" altLang="zh-TW" dirty="0">
+              <a:latin typeface="Arial Narrow" panose="020B0604020202020204" pitchFamily="34" charset="0"/>
+              <a:ea typeface="SimSun" panose="02010600030101010101" pitchFamily="2" charset="-122"/>
+            </a:endParaRPr>
           </a:p>
           <a:p>
             <a:pPr eaLnBrk="1" hangingPunct="1"/>
             <a:r>
-              <a:rPr lang="zh-TW" altLang="en-US"/>
-              <a:t>政大選舉研究中心</a:t>
+              <a:rPr lang="en-US" altLang="zh-TW">
+                <a:latin typeface="Arial Narrow" panose="020B0604020202020204" pitchFamily="34" charset="0"/>
+                <a:ea typeface="SimSun" panose="02010600030101010101" pitchFamily="2" charset="-122"/>
+              </a:rPr>
+              <a:t>3/11/22026</a:t>
             </a:r>
-          </a:p>
-          <a:p>
-            <a:pPr eaLnBrk="1" hangingPunct="1"/>
-            <a:r>
-              <a:rPr lang="zh-TW" altLang="en-US"/>
-              <a:t>研究員</a:t>
-            </a:r>
+            <a:endParaRPr lang="zh-TW" altLang="en-US" dirty="0">
+              <a:latin typeface="Arial Narrow" panose="020B0604020202020204" pitchFamily="34" charset="0"/>
+              <a:ea typeface="SimSun" panose="02010600030101010101" pitchFamily="2" charset="-122"/>
+            </a:endParaRPr>
           </a:p>
         </p:txBody>
       </p:sp>
@@ -8544,12 +8549,28 @@
               <a:rPr lang="zh-TW" altLang="en-US" dirty="0"/>
               <a:t>我不感興趣</a:t>
             </a:r>
+            <a:endParaRPr lang="en-US" altLang="zh-TW" dirty="0"/>
+          </a:p>
+          <a:p>
+            <a:pPr eaLnBrk="1" hangingPunct="1"/>
+            <a:r>
+              <a:rPr lang="zh-TW" altLang="en-US" dirty="0"/>
+              <a:t>我很忙</a:t>
+            </a:r>
           </a:p>
           <a:p>
             <a:pPr eaLnBrk="1" hangingPunct="1"/>
             <a:r>
               <a:rPr lang="zh-TW" altLang="en-US" dirty="0"/>
               <a:t>我對這些事都不知道</a:t>
+            </a:r>
+            <a:endParaRPr lang="en-US" altLang="zh-TW" dirty="0"/>
+          </a:p>
+          <a:p>
+            <a:pPr eaLnBrk="1" hangingPunct="1"/>
+            <a:r>
+              <a:rPr lang="zh-TW" altLang="en-US" dirty="0"/>
+              <a:t>你們是詐騙集團？</a:t>
             </a:r>
           </a:p>
         </p:txBody>
@@ -8847,8 +8868,24 @@
             <a:endParaRPr lang="en-US" altLang="zh-TW" sz="2000" dirty="0"/>
           </a:p>
           <a:p>
-            <a:pPr eaLnBrk="1" hangingPunct="1"/>
-            <a:endParaRPr lang="zh-TW" altLang="en-US" dirty="0"/>
+            <a:pPr eaLnBrk="1" hangingPunct="1">
+              <a:lnSpc>
+                <a:spcPct val="150000"/>
+              </a:lnSpc>
+            </a:pPr>
+            <a:r>
+              <a:rPr lang="zh-TW" altLang="en-US" sz="2000" dirty="0"/>
+              <a:t>通常成功率約為</a:t>
+            </a:r>
+            <a:r>
+              <a:rPr lang="en-US" altLang="zh-TW" sz="2000" dirty="0"/>
+              <a:t>1%</a:t>
+            </a:r>
+            <a:r>
+              <a:rPr lang="zh-TW" altLang="en-US" sz="2000" dirty="0"/>
+              <a:t>。</a:t>
+            </a:r>
+            <a:endParaRPr lang="en-US" altLang="zh-TW" sz="2000" dirty="0"/>
           </a:p>
         </p:txBody>
       </p:sp>
@@ -9447,7 +9484,7 @@
             </a:pPr>
             <a:r>
               <a:rPr lang="zh-TW" altLang="en-US" sz="2000" dirty="0"/>
-              <a:t>樣本代表性差：無法像面訪可以事先確定樣本所在的都市化程度，相對的樣本代表性較不理想。</a:t>
+              <a:t>樣本代表性差：無法像面訪可以事先確定樣本所在的都市化程度，而且更換樣本是在同一個村里。電訪只能根據電話號碼簿抽樣，樣本代表性較不理想。</a:t>
             </a:r>
             <a:endParaRPr lang="en-US" altLang="zh-TW" sz="2000" dirty="0"/>
           </a:p>
@@ -9461,7 +9498,7 @@
             </a:pPr>
             <a:r>
               <a:rPr lang="zh-TW" altLang="en-US" sz="2000" dirty="0"/>
-              <a:t>看不到受訪情境：僅能用聲音與受訪者互動，有可能中斷。</a:t>
+              <a:t>看不到受訪情境：僅能用聲音與受訪者互動，看不到對方表情，也有可能中斷。</a:t>
             </a:r>
             <a:endParaRPr lang="en-US" altLang="zh-TW" sz="2000" dirty="0"/>
           </a:p>
@@ -9845,7 +9882,7 @@
           <a:p>
             <a:r>
               <a:rPr lang="zh-TW" altLang="en-US" dirty="0"/>
-              <a:t>住宅電話樣本來源</a:t>
+              <a:t>住宅電話樣本來源（一）</a:t>
             </a:r>
           </a:p>
         </p:txBody>
@@ -9987,7 +10024,7 @@
               <a:rPr lang="zh-TW" altLang="en-US" sz="2000" dirty="0">
                 <a:latin typeface="ARMingB5"/>
               </a:rPr>
-              <a:t>。</a:t>
+              <a:t>。因此，有必要考慮加入手機樣本。</a:t>
             </a:r>
             <a:endParaRPr lang="en-US" altLang="zh-TW" sz="2000" dirty="0"/>
           </a:p>
@@ -10049,13 +10086,7 @@
   <p:cSld>
     <p:spTree>
       <p:nvGrpSpPr>
-        <p:cNvPr id="1" name="">
-          <a:extLst>
-            <a:ext uri="{FF2B5EF4-FFF2-40B4-BE49-F238E27FC236}">
-              <a16:creationId xmlns:a16="http://schemas.microsoft.com/office/drawing/2014/main" id="{DD080001-6CF1-CD71-EA09-8CED0D2F2356}"/>
-            </a:ext>
-          </a:extLst>
-        </p:cNvPr>
+        <p:cNvPr id="1" name=""/>
         <p:cNvGrpSpPr/>
         <p:nvPr/>
       </p:nvGrpSpPr>
@@ -10072,7 +10103,7 @@
           <p:cNvPr id="5" name="標題 4">
             <a:extLst>
               <a:ext uri="{FF2B5EF4-FFF2-40B4-BE49-F238E27FC236}">
-                <a16:creationId xmlns:a16="http://schemas.microsoft.com/office/drawing/2014/main" id="{817AE924-B064-E29B-89DA-CD243F5E2BFE}"/>
+                <a16:creationId xmlns:a16="http://schemas.microsoft.com/office/drawing/2014/main" id="{CB4A9A85-28F9-8D76-0816-F5B9FBBD1AD8}"/>
               </a:ext>
             </a:extLst>
           </p:cNvPr>
@@ -10090,7 +10121,7 @@
           <a:p>
             <a:r>
               <a:rPr lang="zh-TW" altLang="en-US" dirty="0"/>
-              <a:t>行動電話樣本來源（一）</a:t>
+              <a:t>住宅電話樣本來源（二）</a:t>
             </a:r>
           </a:p>
         </p:txBody>
@@ -10100,7 +10131,7 @@
           <p:cNvPr id="6" name="內容版面配置區 5">
             <a:extLst>
               <a:ext uri="{FF2B5EF4-FFF2-40B4-BE49-F238E27FC236}">
-                <a16:creationId xmlns:a16="http://schemas.microsoft.com/office/drawing/2014/main" id="{3602B71B-EF1E-3B67-74D0-ADE8E29E065B}"/>
+                <a16:creationId xmlns:a16="http://schemas.microsoft.com/office/drawing/2014/main" id="{FBB82FCF-8B36-3C03-5DC6-04B5266445B7}"/>
               </a:ext>
             </a:extLst>
           </p:cNvPr>
@@ -10123,39 +10154,7 @@
             </a:pPr>
             <a:r>
               <a:rPr lang="zh-TW" altLang="en-US" sz="2000" dirty="0"/>
-              <a:t>採簡單隨機抽樣法，依國家通訊傳播委員會</a:t>
-            </a:r>
-            <a:r>
-              <a:rPr lang="en-US" altLang="zh-TW" sz="2000" dirty="0"/>
-              <a:t>(</a:t>
-            </a:r>
-            <a:r>
-              <a:rPr lang="en" altLang="zh-TW" sz="2000" dirty="0"/>
-              <a:t>NCC)</a:t>
-            </a:r>
-            <a:r>
-              <a:rPr lang="zh-TW" altLang="en" sz="2000" dirty="0"/>
-              <a:t>「</a:t>
-            </a:r>
-            <a:r>
-              <a:rPr lang="zh-TW" altLang="en-US" sz="2000" dirty="0"/>
-              <a:t>行動通信網路業 務用戶號碼核配資料」抽出行動電話前 </a:t>
-            </a:r>
-            <a:r>
-              <a:rPr lang="en-US" altLang="zh-TW" sz="2000" dirty="0"/>
-              <a:t>5 </a:t>
-            </a:r>
-            <a:r>
-              <a:rPr lang="zh-TW" altLang="en-US" sz="2000" dirty="0"/>
-              <a:t>碼，再隨機撥號後 </a:t>
-            </a:r>
-            <a:r>
-              <a:rPr lang="en-US" altLang="zh-TW" sz="2000" dirty="0"/>
-              <a:t>5 </a:t>
-            </a:r>
-            <a:r>
-              <a:rPr lang="zh-TW" altLang="en-US" sz="2000" dirty="0"/>
-              <a:t>碼。</a:t>
+              <a:t>實務上，因為民調公司會累積許多接觸過的電話號碼，就會知道哪些號碼可能落在哪些地區。</a:t>
             </a:r>
           </a:p>
           <a:p>
@@ -10165,14 +10164,74 @@
               </a:lnSpc>
             </a:pPr>
             <a:r>
-              <a:rPr lang="zh-TW" altLang="en-US" sz="2000" dirty="0">
-                <a:latin typeface="ARMingB5"/>
-              </a:rPr>
-              <a:t>為了在行動電話樣本中區分「唯手機族」，有的訪問單位會刻意在訪問一開始問是不是會用住宅電話接電話？如果是的話就不繼續訪問。</a:t>
+              <a:rPr lang="zh-TW" altLang="en-US" sz="2000" dirty="0"/>
+              <a:t>例如在過去</a:t>
             </a:r>
-            <a:endParaRPr lang="en-US" altLang="zh-TW" sz="2000" dirty="0">
-              <a:latin typeface="ARMingB5"/>
-            </a:endParaRPr>
+            <a:r>
+              <a:rPr lang="en-US" altLang="zh-TW" sz="2000" dirty="0"/>
+              <a:t>5</a:t>
+            </a:r>
+            <a:r>
+              <a:rPr lang="zh-TW" altLang="en-US" sz="2000" dirty="0"/>
+              <a:t>萬個號碼中，其中有</a:t>
+            </a:r>
+            <a:r>
+              <a:rPr lang="en-US" altLang="zh-TW" sz="2000" dirty="0"/>
+              <a:t>1</a:t>
+            </a:r>
+            <a:r>
+              <a:rPr lang="zh-TW" altLang="en-US" sz="2000" dirty="0"/>
+              <a:t>萬</a:t>
+            </a:r>
+            <a:r>
+              <a:rPr lang="en-US" altLang="zh-TW" sz="2000" dirty="0"/>
+              <a:t>5</a:t>
+            </a:r>
+            <a:r>
+              <a:rPr lang="zh-TW" altLang="en-US" sz="2000" dirty="0"/>
+              <a:t>千通是來自</a:t>
+            </a:r>
+            <a:r>
+              <a:rPr lang="en-US" altLang="zh-TW" sz="2000" dirty="0"/>
+              <a:t>10</a:t>
+            </a:r>
+            <a:r>
+              <a:rPr lang="zh-TW" altLang="en-US" sz="2000" dirty="0"/>
+              <a:t>組前面的號碼</a:t>
+            </a:r>
+            <a:r>
+              <a:rPr lang="en-US" altLang="zh-TW" sz="2000" dirty="0"/>
+              <a:t>(2434, ….2423)</a:t>
+            </a:r>
+            <a:r>
+              <a:rPr lang="zh-TW" altLang="en-US" sz="2000" dirty="0"/>
+              <a:t>，而在這</a:t>
+            </a:r>
+            <a:r>
+              <a:rPr lang="en-US" altLang="zh-TW" sz="2000" dirty="0"/>
+              <a:t>1</a:t>
+            </a:r>
+            <a:r>
+              <a:rPr lang="zh-TW" altLang="en-US" sz="2000" dirty="0"/>
+              <a:t>萬</a:t>
+            </a:r>
+            <a:r>
+              <a:rPr lang="en-US" altLang="zh-TW" sz="2000" dirty="0"/>
+              <a:t>5</a:t>
+            </a:r>
+            <a:r>
+              <a:rPr lang="zh-TW" altLang="en-US" sz="2000" dirty="0"/>
+              <a:t>千通裡面，又有</a:t>
+            </a:r>
+            <a:r>
+              <a:rPr lang="en-US" altLang="zh-TW" sz="2000" dirty="0"/>
+              <a:t>8</a:t>
+            </a:r>
+            <a:r>
+              <a:rPr lang="zh-TW" altLang="en-US" sz="2000" dirty="0"/>
+              <a:t>千多通的受訪者說他們住在基隆市某某區。</a:t>
+            </a:r>
+            <a:endParaRPr lang="en-US" altLang="zh-TW" sz="2000" dirty="0"/>
           </a:p>
           <a:p>
             <a:pPr eaLnBrk="1" hangingPunct="1">
@@ -10181,59 +10240,50 @@
               </a:lnSpc>
             </a:pPr>
             <a:r>
-              <a:rPr lang="zh-TW" altLang="en-US" sz="2000" dirty="0">
-                <a:latin typeface="ARMingB5"/>
-              </a:rPr>
-              <a:t>唯手機族的比例的高低影響是否要結合唯手機族以及住宅電話（非唯手機族）的樣本。洪永泰等學者</a:t>
+              <a:rPr lang="zh-TW" altLang="en-US" sz="2000" dirty="0"/>
+              <a:t>根據這些資訊，如果我們要訪問這一個區的民眾，可以從過去這</a:t>
             </a:r>
             <a:r>
-              <a:rPr lang="en-US" altLang="zh-TW" sz="2000" dirty="0">
-                <a:latin typeface="ARMingB5"/>
-              </a:rPr>
-              <a:t>(2014)</a:t>
+              <a:rPr lang="en-US" altLang="zh-TW" sz="2000" dirty="0"/>
+              <a:t>10</a:t>
             </a:r>
             <a:r>
-              <a:rPr lang="zh-TW" altLang="en-US" sz="2000" dirty="0">
-                <a:latin typeface="ARMingB5"/>
-              </a:rPr>
-              <a:t>根據電訪推算是</a:t>
+              <a:rPr lang="zh-TW" altLang="en-US" sz="2000" dirty="0"/>
+              <a:t>組號碼落在某某區的的比例分配樣本，例如</a:t>
             </a:r>
             <a:r>
-              <a:rPr lang="en-US" altLang="zh-TW" sz="2000" dirty="0">
-                <a:latin typeface="ARMingB5"/>
-              </a:rPr>
-              <a:t>9%</a:t>
+              <a:rPr lang="en-US" altLang="zh-TW" sz="2000" dirty="0"/>
+              <a:t>2434</a:t>
             </a:r>
             <a:r>
-              <a:rPr lang="zh-TW" altLang="en-US" sz="2000" dirty="0">
-                <a:latin typeface="ARMingB5"/>
-              </a:rPr>
-              <a:t>。</a:t>
+              <a:rPr lang="zh-TW" altLang="en-US" sz="2000" dirty="0"/>
+              <a:t>分配到</a:t>
             </a:r>
-            <a:endParaRPr lang="en-US" altLang="zh-TW" sz="2000" dirty="0">
-              <a:latin typeface="ARMingB5"/>
-            </a:endParaRPr>
-          </a:p>
-          <a:p>
-            <a:pPr eaLnBrk="1" hangingPunct="1">
-              <a:lnSpc>
-                <a:spcPct val="150000"/>
-              </a:lnSpc>
-            </a:pPr>
-            <a:endParaRPr lang="en-US" altLang="zh-TW" sz="2000" dirty="0">
-              <a:latin typeface="ARMingB5"/>
-            </a:endParaRPr>
-          </a:p>
-          <a:p>
-            <a:pPr eaLnBrk="1" hangingPunct="1">
-              <a:lnSpc>
-                <a:spcPct val="150000"/>
-              </a:lnSpc>
-            </a:pPr>
+            <a:r>
+              <a:rPr lang="en-US" altLang="zh-TW" sz="2000" dirty="0"/>
+              <a:t>10%</a:t>
+            </a:r>
+            <a:r>
+              <a:rPr lang="zh-TW" altLang="en-US" sz="2000" dirty="0"/>
+              <a:t>的樣本，</a:t>
+            </a:r>
+            <a:r>
+              <a:rPr lang="en-US" altLang="zh-TW" sz="2000" dirty="0"/>
+              <a:t>2432</a:t>
+            </a:r>
+            <a:r>
+              <a:rPr lang="zh-TW" altLang="en-US" sz="2000" dirty="0"/>
+              <a:t>分到</a:t>
+            </a:r>
+            <a:r>
+              <a:rPr lang="en-US" altLang="zh-TW" sz="2000" dirty="0"/>
+              <a:t>8%</a:t>
+            </a:r>
+            <a:r>
+              <a:rPr lang="zh-TW" altLang="en-US" sz="2000" dirty="0"/>
+              <a:t>，以此類推。</a:t>
+            </a:r>
             <a:endParaRPr lang="en-US" altLang="zh-TW" sz="2000" dirty="0"/>
-          </a:p>
-          <a:p>
-            <a:endParaRPr lang="zh-TW" altLang="en-US" dirty="0"/>
           </a:p>
         </p:txBody>
       </p:sp>
@@ -10242,7 +10292,7 @@
           <p:cNvPr id="2" name="投影片編號版面配置區 1">
             <a:extLst>
               <a:ext uri="{FF2B5EF4-FFF2-40B4-BE49-F238E27FC236}">
-                <a16:creationId xmlns:a16="http://schemas.microsoft.com/office/drawing/2014/main" id="{E67B9EBD-F725-9649-CCE6-E74EBEA70D2C}"/>
+                <a16:creationId xmlns:a16="http://schemas.microsoft.com/office/drawing/2014/main" id="{8B8AABD6-B71F-47DD-29F8-5435C46D8084}"/>
               </a:ext>
             </a:extLst>
           </p:cNvPr>
@@ -10275,7 +10325,7 @@
     </p:spTree>
     <p:extLst>
       <p:ext uri="{BB962C8B-B14F-4D97-AF65-F5344CB8AC3E}">
-        <p14:creationId xmlns:p14="http://schemas.microsoft.com/office/powerpoint/2010/main" val="2859338666"/>
+        <p14:creationId xmlns:p14="http://schemas.microsoft.com/office/powerpoint/2010/main" val="4111188088"/>
       </p:ext>
     </p:extLst>
   </p:cSld>
@@ -10639,6 +10689,247 @@
   <p:cSld>
     <p:spTree>
       <p:nvGrpSpPr>
+        <p:cNvPr id="1" name="">
+          <a:extLst>
+            <a:ext uri="{FF2B5EF4-FFF2-40B4-BE49-F238E27FC236}">
+              <a16:creationId xmlns:a16="http://schemas.microsoft.com/office/drawing/2014/main" id="{DD080001-6CF1-CD71-EA09-8CED0D2F2356}"/>
+            </a:ext>
+          </a:extLst>
+        </p:cNvPr>
+        <p:cNvGrpSpPr/>
+        <p:nvPr/>
+      </p:nvGrpSpPr>
+      <p:grpSpPr>
+        <a:xfrm>
+          <a:off x="0" y="0"/>
+          <a:ext cx="0" cy="0"/>
+          <a:chOff x="0" y="0"/>
+          <a:chExt cx="0" cy="0"/>
+        </a:xfrm>
+      </p:grpSpPr>
+      <p:sp>
+        <p:nvSpPr>
+          <p:cNvPr id="5" name="標題 4">
+            <a:extLst>
+              <a:ext uri="{FF2B5EF4-FFF2-40B4-BE49-F238E27FC236}">
+                <a16:creationId xmlns:a16="http://schemas.microsoft.com/office/drawing/2014/main" id="{817AE924-B064-E29B-89DA-CD243F5E2BFE}"/>
+              </a:ext>
+            </a:extLst>
+          </p:cNvPr>
+          <p:cNvSpPr>
+            <a:spLocks noGrp="1"/>
+          </p:cNvSpPr>
+          <p:nvPr>
+            <p:ph type="title"/>
+          </p:nvPr>
+        </p:nvSpPr>
+        <p:spPr/>
+        <p:txBody>
+          <a:bodyPr/>
+          <a:lstStyle/>
+          <a:p>
+            <a:r>
+              <a:rPr lang="zh-TW" altLang="en-US" dirty="0"/>
+              <a:t>行動電話樣本來源（一）</a:t>
+            </a:r>
+          </a:p>
+        </p:txBody>
+      </p:sp>
+      <p:sp>
+        <p:nvSpPr>
+          <p:cNvPr id="6" name="內容版面配置區 5">
+            <a:extLst>
+              <a:ext uri="{FF2B5EF4-FFF2-40B4-BE49-F238E27FC236}">
+                <a16:creationId xmlns:a16="http://schemas.microsoft.com/office/drawing/2014/main" id="{3602B71B-EF1E-3B67-74D0-ADE8E29E065B}"/>
+              </a:ext>
+            </a:extLst>
+          </p:cNvPr>
+          <p:cNvSpPr>
+            <a:spLocks noGrp="1"/>
+          </p:cNvSpPr>
+          <p:nvPr>
+            <p:ph idx="1"/>
+          </p:nvPr>
+        </p:nvSpPr>
+        <p:spPr/>
+        <p:txBody>
+          <a:bodyPr/>
+          <a:lstStyle/>
+          <a:p>
+            <a:pPr eaLnBrk="1" hangingPunct="1">
+              <a:lnSpc>
+                <a:spcPct val="150000"/>
+              </a:lnSpc>
+            </a:pPr>
+            <a:r>
+              <a:rPr lang="zh-TW" altLang="en-US" sz="2000" dirty="0"/>
+              <a:t>採簡單隨機抽樣法，依國家通訊傳播委員會</a:t>
+            </a:r>
+            <a:r>
+              <a:rPr lang="en-US" altLang="zh-TW" sz="2000" dirty="0"/>
+              <a:t>(</a:t>
+            </a:r>
+            <a:r>
+              <a:rPr lang="en" altLang="zh-TW" sz="2000" dirty="0"/>
+              <a:t>NCC)</a:t>
+            </a:r>
+            <a:r>
+              <a:rPr lang="zh-TW" altLang="en" sz="2000" dirty="0"/>
+              <a:t>「</a:t>
+            </a:r>
+            <a:r>
+              <a:rPr lang="zh-TW" altLang="en-US" sz="2000" dirty="0"/>
+              <a:t>行動通信網路業務用戶號碼核配資料」抽出行動電話前 </a:t>
+            </a:r>
+            <a:r>
+              <a:rPr lang="en-US" altLang="zh-TW" sz="2000" dirty="0"/>
+              <a:t>5 </a:t>
+            </a:r>
+            <a:r>
+              <a:rPr lang="zh-TW" altLang="en-US" sz="2000" dirty="0"/>
+              <a:t>碼，再隨機撥號後 </a:t>
+            </a:r>
+            <a:r>
+              <a:rPr lang="en-US" altLang="zh-TW" sz="2000" dirty="0"/>
+              <a:t>5 </a:t>
+            </a:r>
+            <a:r>
+              <a:rPr lang="zh-TW" altLang="en-US" sz="2000" dirty="0"/>
+              <a:t>碼。</a:t>
+            </a:r>
+          </a:p>
+          <a:p>
+            <a:pPr eaLnBrk="1" hangingPunct="1">
+              <a:lnSpc>
+                <a:spcPct val="150000"/>
+              </a:lnSpc>
+            </a:pPr>
+            <a:r>
+              <a:rPr lang="zh-TW" altLang="en-US" sz="2000" dirty="0">
+                <a:latin typeface="ARMingB5"/>
+              </a:rPr>
+              <a:t>為了在行動電話樣本中區分「唯手機族」，有的訪問單位會刻意在訪問一開始問是不是會用住宅電話接電話？如果是的話就不繼續訪問。</a:t>
+            </a:r>
+            <a:endParaRPr lang="en-US" altLang="zh-TW" sz="2000" dirty="0">
+              <a:latin typeface="ARMingB5"/>
+            </a:endParaRPr>
+          </a:p>
+          <a:p>
+            <a:pPr eaLnBrk="1" hangingPunct="1">
+              <a:lnSpc>
+                <a:spcPct val="150000"/>
+              </a:lnSpc>
+            </a:pPr>
+            <a:r>
+              <a:rPr lang="zh-TW" altLang="en-US" sz="2000" dirty="0">
+                <a:latin typeface="ARMingB5"/>
+              </a:rPr>
+              <a:t>唯手機族的比例的高低影響是否要結合唯手機族以及住宅電話（非唯手機族）的樣本。洪永泰等學者</a:t>
+            </a:r>
+            <a:r>
+              <a:rPr lang="en-US" altLang="zh-TW" sz="2000" dirty="0">
+                <a:latin typeface="ARMingB5"/>
+              </a:rPr>
+              <a:t>(2014)</a:t>
+            </a:r>
+            <a:r>
+              <a:rPr lang="zh-TW" altLang="en-US" sz="2000" dirty="0">
+                <a:latin typeface="ARMingB5"/>
+              </a:rPr>
+              <a:t>根據電訪推算是</a:t>
+            </a:r>
+            <a:r>
+              <a:rPr lang="en-US" altLang="zh-TW" sz="2000" dirty="0">
+                <a:latin typeface="ARMingB5"/>
+              </a:rPr>
+              <a:t>9%</a:t>
+            </a:r>
+            <a:r>
+              <a:rPr lang="zh-TW" altLang="en-US" sz="2000" dirty="0">
+                <a:latin typeface="ARMingB5"/>
+              </a:rPr>
+              <a:t>。</a:t>
+            </a:r>
+            <a:endParaRPr lang="en-US" altLang="zh-TW" sz="2000" dirty="0">
+              <a:latin typeface="ARMingB5"/>
+            </a:endParaRPr>
+          </a:p>
+          <a:p>
+            <a:pPr eaLnBrk="1" hangingPunct="1">
+              <a:lnSpc>
+                <a:spcPct val="150000"/>
+              </a:lnSpc>
+            </a:pPr>
+            <a:endParaRPr lang="en-US" altLang="zh-TW" sz="2000" dirty="0">
+              <a:latin typeface="ARMingB5"/>
+            </a:endParaRPr>
+          </a:p>
+          <a:p>
+            <a:pPr eaLnBrk="1" hangingPunct="1">
+              <a:lnSpc>
+                <a:spcPct val="150000"/>
+              </a:lnSpc>
+            </a:pPr>
+            <a:endParaRPr lang="en-US" altLang="zh-TW" sz="2000" dirty="0"/>
+          </a:p>
+          <a:p>
+            <a:endParaRPr lang="zh-TW" altLang="en-US" dirty="0"/>
+          </a:p>
+        </p:txBody>
+      </p:sp>
+      <p:sp>
+        <p:nvSpPr>
+          <p:cNvPr id="2" name="投影片編號版面配置區 1">
+            <a:extLst>
+              <a:ext uri="{FF2B5EF4-FFF2-40B4-BE49-F238E27FC236}">
+                <a16:creationId xmlns:a16="http://schemas.microsoft.com/office/drawing/2014/main" id="{E67B9EBD-F725-9649-CCE6-E74EBEA70D2C}"/>
+              </a:ext>
+            </a:extLst>
+          </p:cNvPr>
+          <p:cNvSpPr>
+            <a:spLocks noGrp="1"/>
+          </p:cNvSpPr>
+          <p:nvPr>
+            <p:ph type="sldNum" sz="quarter" idx="12"/>
+          </p:nvPr>
+        </p:nvSpPr>
+        <p:spPr/>
+        <p:txBody>
+          <a:bodyPr/>
+          <a:lstStyle/>
+          <a:p>
+            <a:pPr>
+              <a:defRPr/>
+            </a:pPr>
+            <a:fld id="{B7D764A7-91B1-944C-8857-597FAF30A0D5}" type="slidenum">
+              <a:rPr lang="en-US" altLang="zh-TW" smtClean="0"/>
+              <a:pPr>
+                <a:defRPr/>
+              </a:pPr>
+              <a:t>20</a:t>
+            </a:fld>
+            <a:endParaRPr lang="en-US" altLang="zh-TW"/>
+          </a:p>
+        </p:txBody>
+      </p:sp>
+    </p:spTree>
+    <p:extLst>
+      <p:ext uri="{BB962C8B-B14F-4D97-AF65-F5344CB8AC3E}">
+        <p14:creationId xmlns:p14="http://schemas.microsoft.com/office/powerpoint/2010/main" val="2859338666"/>
+      </p:ext>
+    </p:extLst>
+  </p:cSld>
+  <p:clrMapOvr>
+    <a:masterClrMapping/>
+  </p:clrMapOvr>
+</p:sld>
+</file>
+
+<file path=ppt/slides/slide21.xml><?xml version="1.0" encoding="utf-8"?>
+<p:sld xmlns:a="http://schemas.openxmlformats.org/drawingml/2006/main" xmlns:r="http://schemas.openxmlformats.org/officeDocument/2006/relationships" xmlns:p="http://schemas.openxmlformats.org/presentationml/2006/main">
+  <p:cSld>
+    <p:spTree>
+      <p:nvGrpSpPr>
         <p:cNvPr id="1" name=""/>
         <p:cNvGrpSpPr/>
         <p:nvPr/>
@@ -10811,7 +11102,7 @@
             <a:fld id="{708CBF8C-C7E9-5B48-A5EB-B1FD8294A880}" type="slidenum">
               <a:rPr kumimoji="0" lang="en-US" altLang="zh-TW"/>
               <a:pPr/>
-              <a:t>20</a:t>
+              <a:t>21</a:t>
             </a:fld>
             <a:endParaRPr kumimoji="0" lang="en-US" altLang="zh-TW"/>
           </a:p>
@@ -10961,7 +11252,7 @@
 </p:sld>
 </file>
 
-<file path=ppt/slides/slide21.xml><?xml version="1.0" encoding="utf-8"?>
+<file path=ppt/slides/slide22.xml><?xml version="1.0" encoding="utf-8"?>
 <p:sld xmlns:a="http://schemas.openxmlformats.org/drawingml/2006/main" xmlns:r="http://schemas.openxmlformats.org/officeDocument/2006/relationships" xmlns:p="http://schemas.openxmlformats.org/presentationml/2006/main">
   <p:cSld>
     <p:spTree>
@@ -11178,7 +11469,7 @@
               <a:pPr>
                 <a:defRPr/>
               </a:pPr>
-              <a:t>21</a:t>
+              <a:t>22</a:t>
             </a:fld>
             <a:endParaRPr lang="en-US" altLang="zh-TW"/>
           </a:p>
@@ -11197,7 +11488,7 @@
 </p:sld>
 </file>
 
-<file path=ppt/slides/slide22.xml><?xml version="1.0" encoding="utf-8"?>
+<file path=ppt/slides/slide23.xml><?xml version="1.0" encoding="utf-8"?>
 <p:sld xmlns:a="http://schemas.openxmlformats.org/drawingml/2006/main" xmlns:r="http://schemas.openxmlformats.org/officeDocument/2006/relationships" xmlns:p="http://schemas.openxmlformats.org/presentationml/2006/main">
   <p:cSld>
     <p:spTree>
@@ -11374,7 +11665,7 @@
             <a:fld id="{38655592-82A5-6B4B-B713-D8925699FB8A}" type="slidenum">
               <a:rPr kumimoji="0" lang="en-US" altLang="zh-TW"/>
               <a:pPr/>
-              <a:t>22</a:t>
+              <a:t>23</a:t>
             </a:fld>
             <a:endParaRPr kumimoji="0" lang="en-US" altLang="zh-TW"/>
           </a:p>
@@ -11491,7 +11782,7 @@
 </p:sld>
 </file>
 
-<file path=ppt/slides/slide23.xml><?xml version="1.0" encoding="utf-8"?>
+<file path=ppt/slides/slide24.xml><?xml version="1.0" encoding="utf-8"?>
 <p:sld xmlns:a="http://schemas.openxmlformats.org/drawingml/2006/main" xmlns:r="http://schemas.openxmlformats.org/officeDocument/2006/relationships" xmlns:p="http://schemas.openxmlformats.org/presentationml/2006/main">
   <p:cSld>
     <p:spTree>
@@ -11668,7 +11959,7 @@
             <a:fld id="{23ED8058-7A1C-7845-AA5D-F8028F880DD4}" type="slidenum">
               <a:rPr kumimoji="0" lang="en-US" altLang="zh-TW"/>
               <a:pPr/>
-              <a:t>23</a:t>
+              <a:t>24</a:t>
             </a:fld>
             <a:endParaRPr kumimoji="0" lang="en-US" altLang="zh-TW"/>
           </a:p>
@@ -11773,7 +12064,7 @@
 </p:sld>
 </file>
 
-<file path=ppt/slides/slide24.xml><?xml version="1.0" encoding="utf-8"?>
+<file path=ppt/slides/slide25.xml><?xml version="1.0" encoding="utf-8"?>
 <p:sld xmlns:a="http://schemas.openxmlformats.org/drawingml/2006/main" xmlns:r="http://schemas.openxmlformats.org/officeDocument/2006/relationships" xmlns:p="http://schemas.openxmlformats.org/presentationml/2006/main">
   <p:cSld>
     <p:spTree>
@@ -11950,7 +12241,7 @@
             <a:fld id="{511B8635-DCE6-2B44-8E6E-77319A34FE88}" type="slidenum">
               <a:rPr kumimoji="0" lang="en-US" altLang="zh-TW"/>
               <a:pPr/>
-              <a:t>24</a:t>
+              <a:t>25</a:t>
             </a:fld>
             <a:endParaRPr kumimoji="0" lang="en-US" altLang="zh-TW"/>
           </a:p>
@@ -12036,7 +12327,7 @@
 </p:sld>
 </file>
 
-<file path=ppt/slides/slide25.xml><?xml version="1.0" encoding="utf-8"?>
+<file path=ppt/slides/slide26.xml><?xml version="1.0" encoding="utf-8"?>
 <p:sld xmlns:a="http://schemas.openxmlformats.org/drawingml/2006/main" xmlns:r="http://schemas.openxmlformats.org/officeDocument/2006/relationships" xmlns:p="http://schemas.openxmlformats.org/presentationml/2006/main">
   <p:cSld>
     <p:spTree>
@@ -12213,7 +12504,7 @@
             <a:fld id="{AB4A52FE-C544-9F46-A3E8-9D449F519F46}" type="slidenum">
               <a:rPr kumimoji="0" lang="en-US" altLang="zh-TW"/>
               <a:pPr/>
-              <a:t>25</a:t>
+              <a:t>26</a:t>
             </a:fld>
             <a:endParaRPr kumimoji="0" lang="en-US" altLang="zh-TW"/>
           </a:p>
@@ -18753,7 +19044,7 @@
 </p:sld>
 </file>
 
-<file path=ppt/slides/slide26.xml><?xml version="1.0" encoding="utf-8"?>
+<file path=ppt/slides/slide27.xml><?xml version="1.0" encoding="utf-8"?>
 <p:sld xmlns:a="http://schemas.openxmlformats.org/drawingml/2006/main" xmlns:r="http://schemas.openxmlformats.org/officeDocument/2006/relationships" xmlns:p="http://schemas.openxmlformats.org/presentationml/2006/main">
   <p:cSld>
     <p:spTree>
@@ -18930,7 +19221,7 @@
             <a:fld id="{6EB56BAE-A93B-AD49-88AD-82BB8476F34B}" type="slidenum">
               <a:rPr kumimoji="0" lang="en-US" altLang="zh-TW"/>
               <a:pPr/>
-              <a:t>26</a:t>
+              <a:t>27</a:t>
             </a:fld>
             <a:endParaRPr kumimoji="0" lang="en-US" altLang="zh-TW"/>
           </a:p>
@@ -25291,7 +25582,7 @@
 </p:sld>
 </file>
 
-<file path=ppt/slides/slide27.xml><?xml version="1.0" encoding="utf-8"?>
+<file path=ppt/slides/slide28.xml><?xml version="1.0" encoding="utf-8"?>
 <p:sld xmlns:a="http://schemas.openxmlformats.org/drawingml/2006/main" xmlns:r="http://schemas.openxmlformats.org/officeDocument/2006/relationships" xmlns:p="http://schemas.openxmlformats.org/presentationml/2006/main">
   <p:cSld>
     <p:spTree>
@@ -25468,7 +25759,7 @@
             <a:fld id="{493E5983-0E87-8B43-A764-0D21AA3FC0AE}" type="slidenum">
               <a:rPr kumimoji="0" lang="en-US" altLang="zh-TW"/>
               <a:pPr/>
-              <a:t>27</a:t>
+              <a:t>28</a:t>
             </a:fld>
             <a:endParaRPr kumimoji="0" lang="en-US" altLang="zh-TW"/>
           </a:p>
@@ -25612,7 +25903,7 @@
 </p:sld>
 </file>
 
-<file path=ppt/slides/slide28.xml><?xml version="1.0" encoding="utf-8"?>
+<file path=ppt/slides/slide29.xml><?xml version="1.0" encoding="utf-8"?>
 <p:sld xmlns:a="http://schemas.openxmlformats.org/drawingml/2006/main" xmlns:r="http://schemas.openxmlformats.org/officeDocument/2006/relationships" xmlns:p="http://schemas.openxmlformats.org/presentationml/2006/main" showMasterSp="0">
   <p:cSld>
     <p:spTree>
@@ -25658,7 +25949,7 @@
               <a:pPr>
                 <a:defRPr/>
               </a:pPr>
-              <a:t>28</a:t>
+              <a:t>29</a:t>
             </a:fld>
             <a:endParaRPr lang="en-US" altLang="zh-TW"/>
           </a:p>
@@ -25700,302 +25991,6 @@
         <p14:creationId xmlns:p14="http://schemas.microsoft.com/office/powerpoint/2010/main" val="3895923298"/>
       </p:ext>
     </p:extLst>
-  </p:cSld>
-  <p:clrMapOvr>
-    <a:masterClrMapping/>
-  </p:clrMapOvr>
-</p:sld>
-</file>
-
-<file path=ppt/slides/slide29.xml><?xml version="1.0" encoding="utf-8"?>
-<p:sld xmlns:a="http://schemas.openxmlformats.org/drawingml/2006/main" xmlns:r="http://schemas.openxmlformats.org/officeDocument/2006/relationships" xmlns:p="http://schemas.openxmlformats.org/presentationml/2006/main">
-  <p:cSld>
-    <p:spTree>
-      <p:nvGrpSpPr>
-        <p:cNvPr id="1" name=""/>
-        <p:cNvGrpSpPr/>
-        <p:nvPr/>
-      </p:nvGrpSpPr>
-      <p:grpSpPr>
-        <a:xfrm>
-          <a:off x="0" y="0"/>
-          <a:ext cx="0" cy="0"/>
-          <a:chOff x="0" y="0"/>
-          <a:chExt cx="0" cy="0"/>
-        </a:xfrm>
-      </p:grpSpPr>
-      <p:sp>
-        <p:nvSpPr>
-          <p:cNvPr id="23553" name="Slide Number Placeholder 5">
-            <a:extLst>
-              <a:ext uri="{FF2B5EF4-FFF2-40B4-BE49-F238E27FC236}">
-                <a16:creationId xmlns:a16="http://schemas.microsoft.com/office/drawing/2014/main" id="{5B11C322-FCF9-F2D6-CE2E-A73A74305D30}"/>
-              </a:ext>
-            </a:extLst>
-          </p:cNvPr>
-          <p:cNvSpPr>
-            <a:spLocks noGrp="1"/>
-          </p:cNvSpPr>
-          <p:nvPr>
-            <p:ph type="sldNum" sz="quarter" idx="12"/>
-          </p:nvPr>
-        </p:nvSpPr>
-        <p:spPr>
-          <a:noFill/>
-          <a:extLst>
-            <a:ext uri="{909E8E84-426E-40DD-AFC4-6F175D3DCCD1}">
-              <a14:hiddenFill xmlns:a14="http://schemas.microsoft.com/office/drawing/2010/main">
-                <a:solidFill>
-                  <a:schemeClr val="accent1"/>
-                </a:solidFill>
-              </a14:hiddenFill>
-            </a:ext>
-            <a:ext uri="{91240B29-F687-4F45-9708-019B960494DF}">
-              <a14:hiddenLine xmlns:a14="http://schemas.microsoft.com/office/drawing/2010/main" w="9525">
-                <a:solidFill>
-                  <a:schemeClr val="tx1"/>
-                </a:solidFill>
-                <a:miter lim="800000"/>
-                <a:headEnd/>
-                <a:tailEnd/>
-              </a14:hiddenLine>
-            </a:ext>
-            <a:ext uri="{AF507438-7753-43E0-B8FC-AC1667EBCBE1}">
-              <a14:hiddenEffects xmlns:a14="http://schemas.microsoft.com/office/drawing/2010/main">
-                <a:effectLst>
-                  <a:outerShdw dist="35921" dir="2700000" algn="ctr" rotWithShape="0">
-                    <a:schemeClr val="bg2"/>
-                  </a:outerShdw>
-                </a:effectLst>
-              </a14:hiddenEffects>
-            </a:ext>
-          </a:extLst>
-        </p:spPr>
-        <p:txBody>
-          <a:bodyPr/>
-          <a:lstStyle>
-            <a:lvl1pPr>
-              <a:defRPr kumimoji="1">
-                <a:solidFill>
-                  <a:schemeClr val="tx1"/>
-                </a:solidFill>
-                <a:latin typeface="Tahoma" panose="020B0604030504040204" pitchFamily="34" charset="0"/>
-                <a:ea typeface="新細明體" panose="02020500000000000000" pitchFamily="18" charset="-120"/>
-              </a:defRPr>
-            </a:lvl1pPr>
-            <a:lvl2pPr marL="742950" indent="-285750">
-              <a:defRPr kumimoji="1">
-                <a:solidFill>
-                  <a:schemeClr val="tx1"/>
-                </a:solidFill>
-                <a:latin typeface="Tahoma" panose="020B0604030504040204" pitchFamily="34" charset="0"/>
-                <a:ea typeface="新細明體" panose="02020500000000000000" pitchFamily="18" charset="-120"/>
-              </a:defRPr>
-            </a:lvl2pPr>
-            <a:lvl3pPr marL="1143000" indent="-228600">
-              <a:defRPr kumimoji="1">
-                <a:solidFill>
-                  <a:schemeClr val="tx1"/>
-                </a:solidFill>
-                <a:latin typeface="Tahoma" panose="020B0604030504040204" pitchFamily="34" charset="0"/>
-                <a:ea typeface="新細明體" panose="02020500000000000000" pitchFamily="18" charset="-120"/>
-              </a:defRPr>
-            </a:lvl3pPr>
-            <a:lvl4pPr marL="1600200" indent="-228600">
-              <a:defRPr kumimoji="1">
-                <a:solidFill>
-                  <a:schemeClr val="tx1"/>
-                </a:solidFill>
-                <a:latin typeface="Tahoma" panose="020B0604030504040204" pitchFamily="34" charset="0"/>
-                <a:ea typeface="新細明體" panose="02020500000000000000" pitchFamily="18" charset="-120"/>
-              </a:defRPr>
-            </a:lvl4pPr>
-            <a:lvl5pPr marL="2057400" indent="-228600">
-              <a:defRPr kumimoji="1">
-                <a:solidFill>
-                  <a:schemeClr val="tx1"/>
-                </a:solidFill>
-                <a:latin typeface="Tahoma" panose="020B0604030504040204" pitchFamily="34" charset="0"/>
-                <a:ea typeface="新細明體" panose="02020500000000000000" pitchFamily="18" charset="-120"/>
-              </a:defRPr>
-            </a:lvl5pPr>
-            <a:lvl6pPr marL="2514600" indent="-228600" eaLnBrk="0" fontAlgn="base" hangingPunct="0">
-              <a:spcBef>
-                <a:spcPct val="0"/>
-              </a:spcBef>
-              <a:spcAft>
-                <a:spcPct val="0"/>
-              </a:spcAft>
-              <a:defRPr kumimoji="1">
-                <a:solidFill>
-                  <a:schemeClr val="tx1"/>
-                </a:solidFill>
-                <a:latin typeface="Tahoma" panose="020B0604030504040204" pitchFamily="34" charset="0"/>
-                <a:ea typeface="新細明體" panose="02020500000000000000" pitchFamily="18" charset="-120"/>
-              </a:defRPr>
-            </a:lvl6pPr>
-            <a:lvl7pPr marL="2971800" indent="-228600" eaLnBrk="0" fontAlgn="base" hangingPunct="0">
-              <a:spcBef>
-                <a:spcPct val="0"/>
-              </a:spcBef>
-              <a:spcAft>
-                <a:spcPct val="0"/>
-              </a:spcAft>
-              <a:defRPr kumimoji="1">
-                <a:solidFill>
-                  <a:schemeClr val="tx1"/>
-                </a:solidFill>
-                <a:latin typeface="Tahoma" panose="020B0604030504040204" pitchFamily="34" charset="0"/>
-                <a:ea typeface="新細明體" panose="02020500000000000000" pitchFamily="18" charset="-120"/>
-              </a:defRPr>
-            </a:lvl7pPr>
-            <a:lvl8pPr marL="3429000" indent="-228600" eaLnBrk="0" fontAlgn="base" hangingPunct="0">
-              <a:spcBef>
-                <a:spcPct val="0"/>
-              </a:spcBef>
-              <a:spcAft>
-                <a:spcPct val="0"/>
-              </a:spcAft>
-              <a:defRPr kumimoji="1">
-                <a:solidFill>
-                  <a:schemeClr val="tx1"/>
-                </a:solidFill>
-                <a:latin typeface="Tahoma" panose="020B0604030504040204" pitchFamily="34" charset="0"/>
-                <a:ea typeface="新細明體" panose="02020500000000000000" pitchFamily="18" charset="-120"/>
-              </a:defRPr>
-            </a:lvl8pPr>
-            <a:lvl9pPr marL="3886200" indent="-228600" eaLnBrk="0" fontAlgn="base" hangingPunct="0">
-              <a:spcBef>
-                <a:spcPct val="0"/>
-              </a:spcBef>
-              <a:spcAft>
-                <a:spcPct val="0"/>
-              </a:spcAft>
-              <a:defRPr kumimoji="1">
-                <a:solidFill>
-                  <a:schemeClr val="tx1"/>
-                </a:solidFill>
-                <a:latin typeface="Tahoma" panose="020B0604030504040204" pitchFamily="34" charset="0"/>
-                <a:ea typeface="新細明體" panose="02020500000000000000" pitchFamily="18" charset="-120"/>
-              </a:defRPr>
-            </a:lvl9pPr>
-          </a:lstStyle>
-          <a:p>
-            <a:fld id="{493E5983-0E87-8B43-A764-0D21AA3FC0AE}" type="slidenum">
-              <a:rPr kumimoji="0" lang="en-US" altLang="zh-TW"/>
-              <a:pPr/>
-              <a:t>29</a:t>
-            </a:fld>
-            <a:endParaRPr kumimoji="0" lang="en-US" altLang="zh-TW"/>
-          </a:p>
-        </p:txBody>
-      </p:sp>
-      <p:sp>
-        <p:nvSpPr>
-          <p:cNvPr id="23554" name="Rectangle 2">
-            <a:extLst>
-              <a:ext uri="{FF2B5EF4-FFF2-40B4-BE49-F238E27FC236}">
-                <a16:creationId xmlns:a16="http://schemas.microsoft.com/office/drawing/2014/main" id="{8737C016-D408-BCDB-9A50-468090947885}"/>
-              </a:ext>
-            </a:extLst>
-          </p:cNvPr>
-          <p:cNvSpPr>
-            <a:spLocks noGrp="1" noChangeArrowheads="1"/>
-          </p:cNvSpPr>
-          <p:nvPr>
-            <p:ph type="title"/>
-          </p:nvPr>
-        </p:nvSpPr>
-        <p:spPr/>
-        <p:txBody>
-          <a:bodyPr/>
-          <a:lstStyle/>
-          <a:p>
-            <a:pPr eaLnBrk="1" hangingPunct="1"/>
-            <a:r>
-              <a:rPr lang="zh-TW" altLang="en-US" dirty="0"/>
-              <a:t>網路調查（二）</a:t>
-            </a:r>
-          </a:p>
-        </p:txBody>
-      </p:sp>
-      <p:sp>
-        <p:nvSpPr>
-          <p:cNvPr id="23555" name="Rectangle 3">
-            <a:extLst>
-              <a:ext uri="{FF2B5EF4-FFF2-40B4-BE49-F238E27FC236}">
-                <a16:creationId xmlns:a16="http://schemas.microsoft.com/office/drawing/2014/main" id="{5CC1F135-C972-6C65-C5AF-1ACA11310D91}"/>
-              </a:ext>
-            </a:extLst>
-          </p:cNvPr>
-          <p:cNvSpPr>
-            <a:spLocks noGrp="1" noChangeArrowheads="1"/>
-          </p:cNvSpPr>
-          <p:nvPr>
-            <p:ph type="body" idx="1"/>
-          </p:nvPr>
-        </p:nvSpPr>
-        <p:spPr/>
-        <p:txBody>
-          <a:bodyPr/>
-          <a:lstStyle/>
-          <a:p>
-            <a:pPr eaLnBrk="1" hangingPunct="1">
-              <a:lnSpc>
-                <a:spcPct val="80000"/>
-              </a:lnSpc>
-            </a:pPr>
-            <a:r>
-              <a:rPr lang="zh-TW" altLang="en-US" sz="2800" dirty="0"/>
-              <a:t>特色</a:t>
-            </a:r>
-            <a:endParaRPr lang="en-US" altLang="zh-TW" sz="2800" dirty="0"/>
-          </a:p>
-          <a:p>
-            <a:pPr marL="514350" indent="-514350" eaLnBrk="1" hangingPunct="1">
-              <a:lnSpc>
-                <a:spcPct val="150000"/>
-              </a:lnSpc>
-              <a:buFont typeface="+mj-lt"/>
-              <a:buAutoNum type="arabicPeriod"/>
-            </a:pPr>
-            <a:r>
-              <a:rPr lang="zh-TW" altLang="en-US" sz="2000" dirty="0"/>
-              <a:t>即時性：在研究倫理審查以及經費許可下，可以即時發送問卷，不必招募訪員也不必抽樣。</a:t>
-            </a:r>
-            <a:endParaRPr lang="en-US" altLang="zh-TW" sz="2000" dirty="0"/>
-          </a:p>
-          <a:p>
-            <a:pPr marL="514350" indent="-514350" eaLnBrk="1" hangingPunct="1">
-              <a:lnSpc>
-                <a:spcPct val="150000"/>
-              </a:lnSpc>
-              <a:buFont typeface="+mj-lt"/>
-              <a:buAutoNum type="arabicPeriod"/>
-            </a:pPr>
-            <a:r>
-              <a:rPr lang="zh-TW" altLang="en-US" sz="2000" dirty="0"/>
-              <a:t>方便性：受訪者回應存成可分析的格式，方便分析，不需要複查。</a:t>
-            </a:r>
-            <a:endParaRPr lang="en-US" altLang="zh-TW" sz="2000" dirty="0"/>
-          </a:p>
-          <a:p>
-            <a:pPr marL="514350" indent="-514350" eaLnBrk="1" hangingPunct="1">
-              <a:lnSpc>
-                <a:spcPct val="150000"/>
-              </a:lnSpc>
-              <a:buFont typeface="+mj-lt"/>
-              <a:buAutoNum type="arabicPeriod"/>
-            </a:pPr>
-            <a:r>
-              <a:rPr lang="zh-TW" altLang="en-US" sz="2000" dirty="0"/>
-              <a:t>成本：相較於面訪以及電訪，因為依賴受訪者自填，節省訪員以及接觸成本。給予受訪者的誘因也比面訪來得少。但是平時要招募受訪者。</a:t>
-            </a:r>
-            <a:endParaRPr lang="en-US" altLang="zh-TW" sz="2000" dirty="0"/>
-          </a:p>
-        </p:txBody>
-      </p:sp>
-    </p:spTree>
   </p:cSld>
   <p:clrMapOvr>
     <a:masterClrMapping/>
@@ -26526,6 +26521,302 @@
             <a:pPr eaLnBrk="1" hangingPunct="1"/>
             <a:r>
               <a:rPr lang="zh-TW" altLang="en-US" dirty="0"/>
+              <a:t>網路調查（二）</a:t>
+            </a:r>
+          </a:p>
+        </p:txBody>
+      </p:sp>
+      <p:sp>
+        <p:nvSpPr>
+          <p:cNvPr id="23555" name="Rectangle 3">
+            <a:extLst>
+              <a:ext uri="{FF2B5EF4-FFF2-40B4-BE49-F238E27FC236}">
+                <a16:creationId xmlns:a16="http://schemas.microsoft.com/office/drawing/2014/main" id="{5CC1F135-C972-6C65-C5AF-1ACA11310D91}"/>
+              </a:ext>
+            </a:extLst>
+          </p:cNvPr>
+          <p:cNvSpPr>
+            <a:spLocks noGrp="1" noChangeArrowheads="1"/>
+          </p:cNvSpPr>
+          <p:nvPr>
+            <p:ph type="body" idx="1"/>
+          </p:nvPr>
+        </p:nvSpPr>
+        <p:spPr/>
+        <p:txBody>
+          <a:bodyPr/>
+          <a:lstStyle/>
+          <a:p>
+            <a:pPr eaLnBrk="1" hangingPunct="1">
+              <a:lnSpc>
+                <a:spcPct val="80000"/>
+              </a:lnSpc>
+            </a:pPr>
+            <a:r>
+              <a:rPr lang="zh-TW" altLang="en-US" sz="2800" dirty="0"/>
+              <a:t>特色</a:t>
+            </a:r>
+            <a:endParaRPr lang="en-US" altLang="zh-TW" sz="2800" dirty="0"/>
+          </a:p>
+          <a:p>
+            <a:pPr marL="514350" indent="-514350" eaLnBrk="1" hangingPunct="1">
+              <a:lnSpc>
+                <a:spcPct val="150000"/>
+              </a:lnSpc>
+              <a:buFont typeface="+mj-lt"/>
+              <a:buAutoNum type="arabicPeriod"/>
+            </a:pPr>
+            <a:r>
+              <a:rPr lang="zh-TW" altLang="en-US" sz="2000" dirty="0"/>
+              <a:t>即時性：在研究倫理審查以及經費許可下，可以即時發送問卷，不必招募訪員也不必抽樣。</a:t>
+            </a:r>
+            <a:endParaRPr lang="en-US" altLang="zh-TW" sz="2000" dirty="0"/>
+          </a:p>
+          <a:p>
+            <a:pPr marL="514350" indent="-514350" eaLnBrk="1" hangingPunct="1">
+              <a:lnSpc>
+                <a:spcPct val="150000"/>
+              </a:lnSpc>
+              <a:buFont typeface="+mj-lt"/>
+              <a:buAutoNum type="arabicPeriod"/>
+            </a:pPr>
+            <a:r>
+              <a:rPr lang="zh-TW" altLang="en-US" sz="2000" dirty="0"/>
+              <a:t>方便性：受訪者回應存成可分析的格式，方便分析，不需要複查。</a:t>
+            </a:r>
+            <a:endParaRPr lang="en-US" altLang="zh-TW" sz="2000" dirty="0"/>
+          </a:p>
+          <a:p>
+            <a:pPr marL="514350" indent="-514350" eaLnBrk="1" hangingPunct="1">
+              <a:lnSpc>
+                <a:spcPct val="150000"/>
+              </a:lnSpc>
+              <a:buFont typeface="+mj-lt"/>
+              <a:buAutoNum type="arabicPeriod"/>
+            </a:pPr>
+            <a:r>
+              <a:rPr lang="zh-TW" altLang="en-US" sz="2000" dirty="0"/>
+              <a:t>成本：相較於面訪以及電訪，因為依賴受訪者自填，節省訪員以及接觸成本。給予受訪者的誘因也比面訪來得少。但是平時要招募受訪者。</a:t>
+            </a:r>
+            <a:endParaRPr lang="en-US" altLang="zh-TW" sz="2000" dirty="0"/>
+          </a:p>
+        </p:txBody>
+      </p:sp>
+    </p:spTree>
+  </p:cSld>
+  <p:clrMapOvr>
+    <a:masterClrMapping/>
+  </p:clrMapOvr>
+</p:sld>
+</file>
+
+<file path=ppt/slides/slide31.xml><?xml version="1.0" encoding="utf-8"?>
+<p:sld xmlns:a="http://schemas.openxmlformats.org/drawingml/2006/main" xmlns:r="http://schemas.openxmlformats.org/officeDocument/2006/relationships" xmlns:p="http://schemas.openxmlformats.org/presentationml/2006/main">
+  <p:cSld>
+    <p:spTree>
+      <p:nvGrpSpPr>
+        <p:cNvPr id="1" name=""/>
+        <p:cNvGrpSpPr/>
+        <p:nvPr/>
+      </p:nvGrpSpPr>
+      <p:grpSpPr>
+        <a:xfrm>
+          <a:off x="0" y="0"/>
+          <a:ext cx="0" cy="0"/>
+          <a:chOff x="0" y="0"/>
+          <a:chExt cx="0" cy="0"/>
+        </a:xfrm>
+      </p:grpSpPr>
+      <p:sp>
+        <p:nvSpPr>
+          <p:cNvPr id="23553" name="Slide Number Placeholder 5">
+            <a:extLst>
+              <a:ext uri="{FF2B5EF4-FFF2-40B4-BE49-F238E27FC236}">
+                <a16:creationId xmlns:a16="http://schemas.microsoft.com/office/drawing/2014/main" id="{5B11C322-FCF9-F2D6-CE2E-A73A74305D30}"/>
+              </a:ext>
+            </a:extLst>
+          </p:cNvPr>
+          <p:cNvSpPr>
+            <a:spLocks noGrp="1"/>
+          </p:cNvSpPr>
+          <p:nvPr>
+            <p:ph type="sldNum" sz="quarter" idx="12"/>
+          </p:nvPr>
+        </p:nvSpPr>
+        <p:spPr>
+          <a:noFill/>
+          <a:extLst>
+            <a:ext uri="{909E8E84-426E-40DD-AFC4-6F175D3DCCD1}">
+              <a14:hiddenFill xmlns:a14="http://schemas.microsoft.com/office/drawing/2010/main">
+                <a:solidFill>
+                  <a:schemeClr val="accent1"/>
+                </a:solidFill>
+              </a14:hiddenFill>
+            </a:ext>
+            <a:ext uri="{91240B29-F687-4F45-9708-019B960494DF}">
+              <a14:hiddenLine xmlns:a14="http://schemas.microsoft.com/office/drawing/2010/main" w="9525">
+                <a:solidFill>
+                  <a:schemeClr val="tx1"/>
+                </a:solidFill>
+                <a:miter lim="800000"/>
+                <a:headEnd/>
+                <a:tailEnd/>
+              </a14:hiddenLine>
+            </a:ext>
+            <a:ext uri="{AF507438-7753-43E0-B8FC-AC1667EBCBE1}">
+              <a14:hiddenEffects xmlns:a14="http://schemas.microsoft.com/office/drawing/2010/main">
+                <a:effectLst>
+                  <a:outerShdw dist="35921" dir="2700000" algn="ctr" rotWithShape="0">
+                    <a:schemeClr val="bg2"/>
+                  </a:outerShdw>
+                </a:effectLst>
+              </a14:hiddenEffects>
+            </a:ext>
+          </a:extLst>
+        </p:spPr>
+        <p:txBody>
+          <a:bodyPr/>
+          <a:lstStyle>
+            <a:lvl1pPr>
+              <a:defRPr kumimoji="1">
+                <a:solidFill>
+                  <a:schemeClr val="tx1"/>
+                </a:solidFill>
+                <a:latin typeface="Tahoma" panose="020B0604030504040204" pitchFamily="34" charset="0"/>
+                <a:ea typeface="新細明體" panose="02020500000000000000" pitchFamily="18" charset="-120"/>
+              </a:defRPr>
+            </a:lvl1pPr>
+            <a:lvl2pPr marL="742950" indent="-285750">
+              <a:defRPr kumimoji="1">
+                <a:solidFill>
+                  <a:schemeClr val="tx1"/>
+                </a:solidFill>
+                <a:latin typeface="Tahoma" panose="020B0604030504040204" pitchFamily="34" charset="0"/>
+                <a:ea typeface="新細明體" panose="02020500000000000000" pitchFamily="18" charset="-120"/>
+              </a:defRPr>
+            </a:lvl2pPr>
+            <a:lvl3pPr marL="1143000" indent="-228600">
+              <a:defRPr kumimoji="1">
+                <a:solidFill>
+                  <a:schemeClr val="tx1"/>
+                </a:solidFill>
+                <a:latin typeface="Tahoma" panose="020B0604030504040204" pitchFamily="34" charset="0"/>
+                <a:ea typeface="新細明體" panose="02020500000000000000" pitchFamily="18" charset="-120"/>
+              </a:defRPr>
+            </a:lvl3pPr>
+            <a:lvl4pPr marL="1600200" indent="-228600">
+              <a:defRPr kumimoji="1">
+                <a:solidFill>
+                  <a:schemeClr val="tx1"/>
+                </a:solidFill>
+                <a:latin typeface="Tahoma" panose="020B0604030504040204" pitchFamily="34" charset="0"/>
+                <a:ea typeface="新細明體" panose="02020500000000000000" pitchFamily="18" charset="-120"/>
+              </a:defRPr>
+            </a:lvl4pPr>
+            <a:lvl5pPr marL="2057400" indent="-228600">
+              <a:defRPr kumimoji="1">
+                <a:solidFill>
+                  <a:schemeClr val="tx1"/>
+                </a:solidFill>
+                <a:latin typeface="Tahoma" panose="020B0604030504040204" pitchFamily="34" charset="0"/>
+                <a:ea typeface="新細明體" panose="02020500000000000000" pitchFamily="18" charset="-120"/>
+              </a:defRPr>
+            </a:lvl5pPr>
+            <a:lvl6pPr marL="2514600" indent="-228600" eaLnBrk="0" fontAlgn="base" hangingPunct="0">
+              <a:spcBef>
+                <a:spcPct val="0"/>
+              </a:spcBef>
+              <a:spcAft>
+                <a:spcPct val="0"/>
+              </a:spcAft>
+              <a:defRPr kumimoji="1">
+                <a:solidFill>
+                  <a:schemeClr val="tx1"/>
+                </a:solidFill>
+                <a:latin typeface="Tahoma" panose="020B0604030504040204" pitchFamily="34" charset="0"/>
+                <a:ea typeface="新細明體" panose="02020500000000000000" pitchFamily="18" charset="-120"/>
+              </a:defRPr>
+            </a:lvl6pPr>
+            <a:lvl7pPr marL="2971800" indent="-228600" eaLnBrk="0" fontAlgn="base" hangingPunct="0">
+              <a:spcBef>
+                <a:spcPct val="0"/>
+              </a:spcBef>
+              <a:spcAft>
+                <a:spcPct val="0"/>
+              </a:spcAft>
+              <a:defRPr kumimoji="1">
+                <a:solidFill>
+                  <a:schemeClr val="tx1"/>
+                </a:solidFill>
+                <a:latin typeface="Tahoma" panose="020B0604030504040204" pitchFamily="34" charset="0"/>
+                <a:ea typeface="新細明體" panose="02020500000000000000" pitchFamily="18" charset="-120"/>
+              </a:defRPr>
+            </a:lvl7pPr>
+            <a:lvl8pPr marL="3429000" indent="-228600" eaLnBrk="0" fontAlgn="base" hangingPunct="0">
+              <a:spcBef>
+                <a:spcPct val="0"/>
+              </a:spcBef>
+              <a:spcAft>
+                <a:spcPct val="0"/>
+              </a:spcAft>
+              <a:defRPr kumimoji="1">
+                <a:solidFill>
+                  <a:schemeClr val="tx1"/>
+                </a:solidFill>
+                <a:latin typeface="Tahoma" panose="020B0604030504040204" pitchFamily="34" charset="0"/>
+                <a:ea typeface="新細明體" panose="02020500000000000000" pitchFamily="18" charset="-120"/>
+              </a:defRPr>
+            </a:lvl8pPr>
+            <a:lvl9pPr marL="3886200" indent="-228600" eaLnBrk="0" fontAlgn="base" hangingPunct="0">
+              <a:spcBef>
+                <a:spcPct val="0"/>
+              </a:spcBef>
+              <a:spcAft>
+                <a:spcPct val="0"/>
+              </a:spcAft>
+              <a:defRPr kumimoji="1">
+                <a:solidFill>
+                  <a:schemeClr val="tx1"/>
+                </a:solidFill>
+                <a:latin typeface="Tahoma" panose="020B0604030504040204" pitchFamily="34" charset="0"/>
+                <a:ea typeface="新細明體" panose="02020500000000000000" pitchFamily="18" charset="-120"/>
+              </a:defRPr>
+            </a:lvl9pPr>
+          </a:lstStyle>
+          <a:p>
+            <a:fld id="{493E5983-0E87-8B43-A764-0D21AA3FC0AE}" type="slidenum">
+              <a:rPr kumimoji="0" lang="en-US" altLang="zh-TW"/>
+              <a:pPr/>
+              <a:t>31</a:t>
+            </a:fld>
+            <a:endParaRPr kumimoji="0" lang="en-US" altLang="zh-TW"/>
+          </a:p>
+        </p:txBody>
+      </p:sp>
+      <p:sp>
+        <p:nvSpPr>
+          <p:cNvPr id="23554" name="Rectangle 2">
+            <a:extLst>
+              <a:ext uri="{FF2B5EF4-FFF2-40B4-BE49-F238E27FC236}">
+                <a16:creationId xmlns:a16="http://schemas.microsoft.com/office/drawing/2014/main" id="{8737C016-D408-BCDB-9A50-468090947885}"/>
+              </a:ext>
+            </a:extLst>
+          </p:cNvPr>
+          <p:cNvSpPr>
+            <a:spLocks noGrp="1" noChangeArrowheads="1"/>
+          </p:cNvSpPr>
+          <p:nvPr>
+            <p:ph type="title"/>
+          </p:nvPr>
+        </p:nvSpPr>
+        <p:spPr/>
+        <p:txBody>
+          <a:bodyPr/>
+          <a:lstStyle/>
+          <a:p>
+            <a:pPr eaLnBrk="1" hangingPunct="1"/>
+            <a:r>
+              <a:rPr lang="zh-TW" altLang="en-US" dirty="0"/>
               <a:t>網路調查（三）</a:t>
             </a:r>
           </a:p>
@@ -26619,7 +26910,7 @@
 </p:sld>
 </file>
 
-<file path=ppt/slides/slide31.xml><?xml version="1.0" encoding="utf-8"?>
+<file path=ppt/slides/slide32.xml><?xml version="1.0" encoding="utf-8"?>
 <p:sld xmlns:a="http://schemas.openxmlformats.org/drawingml/2006/main" xmlns:r="http://schemas.openxmlformats.org/officeDocument/2006/relationships" xmlns:p="http://schemas.openxmlformats.org/presentationml/2006/main" showMasterSp="0">
   <p:cSld>
     <p:spTree>
@@ -26665,7 +26956,7 @@
               <a:pPr>
                 <a:defRPr/>
               </a:pPr>
-              <a:t>31</a:t>
+              <a:t>32</a:t>
             </a:fld>
             <a:endParaRPr lang="en-US" altLang="zh-TW"/>
           </a:p>
@@ -26714,7 +27005,7 @@
 </p:sld>
 </file>
 
-<file path=ppt/slides/slide32.xml><?xml version="1.0" encoding="utf-8"?>
+<file path=ppt/slides/slide33.xml><?xml version="1.0" encoding="utf-8"?>
 <p:sld xmlns:a="http://schemas.openxmlformats.org/drawingml/2006/main" xmlns:r="http://schemas.openxmlformats.org/officeDocument/2006/relationships" xmlns:p="http://schemas.openxmlformats.org/presentationml/2006/main" showMasterSp="0">
   <p:cSld>
     <p:spTree>
@@ -26760,7 +27051,7 @@
               <a:pPr>
                 <a:defRPr/>
               </a:pPr>
-              <a:t>32</a:t>
+              <a:t>33</a:t>
             </a:fld>
             <a:endParaRPr lang="en-US" altLang="zh-TW"/>
           </a:p>
@@ -26809,7 +27100,7 @@
 </p:sld>
 </file>
 
-<file path=ppt/slides/slide33.xml><?xml version="1.0" encoding="utf-8"?>
+<file path=ppt/slides/slide34.xml><?xml version="1.0" encoding="utf-8"?>
 <p:sld xmlns:a="http://schemas.openxmlformats.org/drawingml/2006/main" xmlns:r="http://schemas.openxmlformats.org/officeDocument/2006/relationships" xmlns:p="http://schemas.openxmlformats.org/presentationml/2006/main" showMasterSp="0">
   <p:cSld>
     <p:spTree>
@@ -26855,7 +27146,7 @@
               <a:pPr>
                 <a:defRPr/>
               </a:pPr>
-              <a:t>33</a:t>
+              <a:t>34</a:t>
             </a:fld>
             <a:endParaRPr lang="en-US" altLang="zh-TW"/>
           </a:p>
@@ -26904,7 +27195,7 @@
 </p:sld>
 </file>
 
-<file path=ppt/slides/slide34.xml><?xml version="1.0" encoding="utf-8"?>
+<file path=ppt/slides/slide35.xml><?xml version="1.0" encoding="utf-8"?>
 <p:sld xmlns:a="http://schemas.openxmlformats.org/drawingml/2006/main" xmlns:r="http://schemas.openxmlformats.org/officeDocument/2006/relationships" xmlns:p="http://schemas.openxmlformats.org/presentationml/2006/main" showMasterSp="0">
   <p:cSld>
     <p:spTree>
@@ -26950,7 +27241,7 @@
               <a:pPr>
                 <a:defRPr/>
               </a:pPr>
-              <a:t>34</a:t>
+              <a:t>35</a:t>
             </a:fld>
             <a:endParaRPr lang="en-US" altLang="zh-TW"/>
           </a:p>
@@ -26999,7 +27290,7 @@
 </p:sld>
 </file>
 
-<file path=ppt/slides/slide35.xml><?xml version="1.0" encoding="utf-8"?>
+<file path=ppt/slides/slide36.xml><?xml version="1.0" encoding="utf-8"?>
 <p:sld xmlns:a="http://schemas.openxmlformats.org/drawingml/2006/main" xmlns:r="http://schemas.openxmlformats.org/officeDocument/2006/relationships" xmlns:p="http://schemas.openxmlformats.org/presentationml/2006/main">
   <p:cSld>
     <p:spTree>
@@ -27176,7 +27467,7 @@
             <a:fld id="{493E5983-0E87-8B43-A764-0D21AA3FC0AE}" type="slidenum">
               <a:rPr kumimoji="0" lang="en-US" altLang="zh-TW"/>
               <a:pPr/>
-              <a:t>35</a:t>
+              <a:t>36</a:t>
             </a:fld>
             <a:endParaRPr kumimoji="0" lang="en-US" altLang="zh-TW"/>
           </a:p>
@@ -27272,7 +27563,7 @@
 </p:sld>
 </file>
 
-<file path=ppt/slides/slide36.xml><?xml version="1.0" encoding="utf-8"?>
+<file path=ppt/slides/slide37.xml><?xml version="1.0" encoding="utf-8"?>
 <p:sld xmlns:a="http://schemas.openxmlformats.org/drawingml/2006/main" xmlns:r="http://schemas.openxmlformats.org/officeDocument/2006/relationships" xmlns:p="http://schemas.openxmlformats.org/presentationml/2006/main">
   <p:cSld>
     <p:spTree>
@@ -27449,7 +27740,7 @@
             <a:fld id="{493E5983-0E87-8B43-A764-0D21AA3FC0AE}" type="slidenum">
               <a:rPr kumimoji="0" lang="en-US" altLang="zh-TW"/>
               <a:pPr/>
-              <a:t>36</a:t>
+              <a:t>37</a:t>
             </a:fld>
             <a:endParaRPr kumimoji="0" lang="en-US" altLang="zh-TW"/>
           </a:p>
@@ -27609,7 +27900,7 @@
 </p:sld>
 </file>
 
-<file path=ppt/slides/slide37.xml><?xml version="1.0" encoding="utf-8"?>
+<file path=ppt/slides/slide38.xml><?xml version="1.0" encoding="utf-8"?>
 <p:sld xmlns:a="http://schemas.openxmlformats.org/drawingml/2006/main" xmlns:r="http://schemas.openxmlformats.org/officeDocument/2006/relationships" xmlns:p="http://schemas.openxmlformats.org/presentationml/2006/main">
   <p:cSld>
     <p:spTree>
@@ -27786,7 +28077,7 @@
             <a:fld id="{412C34E0-1A46-A243-934C-463288DE37EA}" type="slidenum">
               <a:rPr kumimoji="0" lang="en-US" altLang="zh-TW"/>
               <a:pPr/>
-              <a:t>37</a:t>
+              <a:t>38</a:t>
             </a:fld>
             <a:endParaRPr kumimoji="0" lang="en-US" altLang="zh-TW"/>
           </a:p>
@@ -27911,18 +28202,12 @@
 </p:sld>
 </file>
 
-<file path=ppt/slides/slide38.xml><?xml version="1.0" encoding="utf-8"?>
+<file path=ppt/slides/slide39.xml><?xml version="1.0" encoding="utf-8"?>
 <p:sld xmlns:a="http://schemas.openxmlformats.org/drawingml/2006/main" xmlns:r="http://schemas.openxmlformats.org/officeDocument/2006/relationships" xmlns:p="http://schemas.openxmlformats.org/presentationml/2006/main">
   <p:cSld>
     <p:spTree>
       <p:nvGrpSpPr>
-        <p:cNvPr id="1" name="">
-          <a:extLst>
-            <a:ext uri="{FF2B5EF4-FFF2-40B4-BE49-F238E27FC236}">
-              <a16:creationId xmlns:a16="http://schemas.microsoft.com/office/drawing/2014/main" id="{4ABFA586-BADE-786D-95AB-C263BE16CA3E}"/>
-            </a:ext>
-          </a:extLst>
-        </p:cNvPr>
+        <p:cNvPr id="1" name=""/>
         <p:cNvGrpSpPr/>
         <p:nvPr/>
       </p:nvGrpSpPr>
@@ -27939,7 +28224,7 @@
           <p:cNvPr id="29697" name="Slide Number Placeholder 5">
             <a:extLst>
               <a:ext uri="{FF2B5EF4-FFF2-40B4-BE49-F238E27FC236}">
-                <a16:creationId xmlns:a16="http://schemas.microsoft.com/office/drawing/2014/main" id="{8A82BC89-453C-3580-4ED8-80B8E53DA768}"/>
+                <a16:creationId xmlns:a16="http://schemas.microsoft.com/office/drawing/2014/main" id="{EB945961-39BD-5A3C-C747-B4D2271F9BA6}"/>
               </a:ext>
             </a:extLst>
           </p:cNvPr>
@@ -28094,7 +28379,7 @@
             <a:fld id="{412C34E0-1A46-A243-934C-463288DE37EA}" type="slidenum">
               <a:rPr kumimoji="0" lang="en-US" altLang="zh-TW"/>
               <a:pPr/>
-              <a:t>38</a:t>
+              <a:t>39</a:t>
             </a:fld>
             <a:endParaRPr kumimoji="0" lang="en-US" altLang="zh-TW"/>
           </a:p>
@@ -28105,7 +28390,7 @@
           <p:cNvPr id="29698" name="Rectangle 2">
             <a:extLst>
               <a:ext uri="{FF2B5EF4-FFF2-40B4-BE49-F238E27FC236}">
-                <a16:creationId xmlns:a16="http://schemas.microsoft.com/office/drawing/2014/main" id="{BEDC186A-406B-3CE4-B94E-99225FADA806}"/>
+                <a16:creationId xmlns:a16="http://schemas.microsoft.com/office/drawing/2014/main" id="{E23C6ADC-5BE2-850A-3B44-A584629153F5}"/>
               </a:ext>
             </a:extLst>
           </p:cNvPr>
@@ -28134,7 +28419,7 @@
           <p:cNvPr id="29699" name="Rectangle 3">
             <a:extLst>
               <a:ext uri="{FF2B5EF4-FFF2-40B4-BE49-F238E27FC236}">
-                <a16:creationId xmlns:a16="http://schemas.microsoft.com/office/drawing/2014/main" id="{C32955E0-BFBD-ACCB-B5C7-12007E2507DA}"/>
+                <a16:creationId xmlns:a16="http://schemas.microsoft.com/office/drawing/2014/main" id="{A1A0BC2A-F64B-C133-20A7-76F37A2A31FF}"/>
               </a:ext>
             </a:extLst>
           </p:cNvPr>
@@ -28152,420 +28437,43 @@
           <a:p>
             <a:pPr eaLnBrk="1" hangingPunct="1">
               <a:lnSpc>
-                <a:spcPct val="90000"/>
+                <a:spcPct val="150000"/>
               </a:lnSpc>
             </a:pPr>
             <a:r>
-              <a:rPr lang="zh-TW" altLang="en-US" dirty="0"/>
-              <a:t>優點</a:t>
+              <a:rPr lang="zh-TW" altLang="en-US" sz="2000" dirty="0"/>
+              <a:t>郵寄問卷最大的優勢在於它通常基於「地址」。</a:t>
             </a:r>
           </a:p>
           <a:p>
-            <a:pPr marL="514350" indent="-514350" eaLnBrk="1" hangingPunct="1">
+            <a:pPr eaLnBrk="1" hangingPunct="1">
               <a:lnSpc>
                 <a:spcPct val="150000"/>
               </a:lnSpc>
-              <a:buFont typeface="+mj-lt"/>
-              <a:buAutoNum type="arabicPeriod"/>
             </a:pPr>
             <a:r>
-              <a:rPr lang="zh-TW" altLang="en-US" dirty="0"/>
-              <a:t> </a:t>
+              <a:rPr lang="zh-TW" altLang="en-US" sz="2000" dirty="0"/>
+              <a:t>在台灣或許多國家，戶籍地址或住宅名冊是極為完整的抽樣框，能涵蓋那些不上網、沒有市話的人群。</a:t>
             </a:r>
-            <a:r>
-              <a:rPr lang="zh-TW" altLang="en-US" sz="2000" dirty="0"/>
-              <a:t>訪問成本低：不需要訪員，也不需要電訪設備。</a:t>
-            </a:r>
-            <a:endParaRPr lang="en-US" altLang="zh-TW" sz="2000" dirty="0"/>
           </a:p>
           <a:p>
-            <a:pPr marL="514350" indent="-514350" eaLnBrk="1" hangingPunct="1">
+            <a:pPr eaLnBrk="1" hangingPunct="1">
               <a:lnSpc>
                 <a:spcPct val="150000"/>
               </a:lnSpc>
-              <a:buFont typeface="+mj-lt"/>
-              <a:buAutoNum type="arabicPeriod"/>
             </a:pPr>
             <a:r>
               <a:rPr lang="zh-TW" altLang="en-US" sz="2000" dirty="0"/>
-              <a:t>可問敏感問題：受訪者自填，所以可以詢問比較敏感的問題。</a:t>
+              <a:t>但是「居住地與戶籍地不符」的情況嚴重（如北漂族），問卷可能寄到老家但本人收不到，導致嚴重的涵蓋誤差。</a:t>
             </a:r>
             <a:endParaRPr lang="en-US" altLang="zh-TW" sz="2000" dirty="0"/>
-          </a:p>
-          <a:p>
-            <a:pPr marL="514350" indent="-514350" eaLnBrk="1" hangingPunct="1">
-              <a:lnSpc>
-                <a:spcPct val="150000"/>
-              </a:lnSpc>
-              <a:buFont typeface="+mj-lt"/>
-              <a:buAutoNum type="arabicPeriod"/>
-            </a:pPr>
-            <a:r>
-              <a:rPr lang="zh-TW" altLang="en-US" sz="2000" dirty="0"/>
-              <a:t>針對特定對象：因為有名單，可以針對特定的受訪者詢問深入的問題，但是也不能推論到全體民眾。</a:t>
-            </a:r>
-            <a:endParaRPr lang="en-US" altLang="zh-TW" sz="2000" dirty="0"/>
-          </a:p>
-          <a:p>
-            <a:pPr marL="514350" indent="-514350" eaLnBrk="1" hangingPunct="1">
-              <a:lnSpc>
-                <a:spcPct val="150000"/>
-              </a:lnSpc>
-              <a:buFont typeface="+mj-lt"/>
-              <a:buAutoNum type="arabicPeriod"/>
-            </a:pPr>
-            <a:r>
-              <a:rPr lang="zh-TW" altLang="en-US" sz="2000" dirty="0"/>
-              <a:t>問卷內容較電訪寬裕，但是也不能過長，使受訪者中途拒訪。</a:t>
-            </a:r>
-            <a:endParaRPr lang="en-US" altLang="zh-TW" sz="2000" dirty="0"/>
-          </a:p>
-          <a:p>
-            <a:pPr marL="514350" indent="-514350" eaLnBrk="1" hangingPunct="1">
-              <a:lnSpc>
-                <a:spcPct val="150000"/>
-              </a:lnSpc>
-              <a:buFont typeface="+mj-lt"/>
-              <a:buAutoNum type="arabicPeriod"/>
-            </a:pPr>
-            <a:r>
-              <a:rPr lang="zh-TW" altLang="en-US" sz="2000" dirty="0"/>
-              <a:t>可以附上誘因，提高受訪者的動機。</a:t>
-            </a:r>
           </a:p>
         </p:txBody>
       </p:sp>
     </p:spTree>
     <p:extLst>
       <p:ext uri="{BB962C8B-B14F-4D97-AF65-F5344CB8AC3E}">
-        <p14:creationId xmlns:p14="http://schemas.microsoft.com/office/powerpoint/2010/main" val="1124606773"/>
-      </p:ext>
-    </p:extLst>
-  </p:cSld>
-  <p:clrMapOvr>
-    <a:masterClrMapping/>
-  </p:clrMapOvr>
-</p:sld>
-</file>
-
-<file path=ppt/slides/slide39.xml><?xml version="1.0" encoding="utf-8"?>
-<p:sld xmlns:a="http://schemas.openxmlformats.org/drawingml/2006/main" xmlns:r="http://schemas.openxmlformats.org/officeDocument/2006/relationships" xmlns:p="http://schemas.openxmlformats.org/presentationml/2006/main">
-  <p:cSld>
-    <p:spTree>
-      <p:nvGrpSpPr>
-        <p:cNvPr id="1" name="">
-          <a:extLst>
-            <a:ext uri="{FF2B5EF4-FFF2-40B4-BE49-F238E27FC236}">
-              <a16:creationId xmlns:a16="http://schemas.microsoft.com/office/drawing/2014/main" id="{529C895C-DA7C-E622-6E4A-1E9EF95BCBA5}"/>
-            </a:ext>
-          </a:extLst>
-        </p:cNvPr>
-        <p:cNvGrpSpPr/>
-        <p:nvPr/>
-      </p:nvGrpSpPr>
-      <p:grpSpPr>
-        <a:xfrm>
-          <a:off x="0" y="0"/>
-          <a:ext cx="0" cy="0"/>
-          <a:chOff x="0" y="0"/>
-          <a:chExt cx="0" cy="0"/>
-        </a:xfrm>
-      </p:grpSpPr>
-      <p:sp>
-        <p:nvSpPr>
-          <p:cNvPr id="29697" name="Slide Number Placeholder 5">
-            <a:extLst>
-              <a:ext uri="{FF2B5EF4-FFF2-40B4-BE49-F238E27FC236}">
-                <a16:creationId xmlns:a16="http://schemas.microsoft.com/office/drawing/2014/main" id="{2A7C20BE-F70C-47E7-2315-881B76BBD918}"/>
-              </a:ext>
-            </a:extLst>
-          </p:cNvPr>
-          <p:cNvSpPr>
-            <a:spLocks noGrp="1"/>
-          </p:cNvSpPr>
-          <p:nvPr>
-            <p:ph type="sldNum" sz="quarter" idx="12"/>
-          </p:nvPr>
-        </p:nvSpPr>
-        <p:spPr>
-          <a:noFill/>
-          <a:extLst>
-            <a:ext uri="{909E8E84-426E-40DD-AFC4-6F175D3DCCD1}">
-              <a14:hiddenFill xmlns:a14="http://schemas.microsoft.com/office/drawing/2010/main">
-                <a:solidFill>
-                  <a:schemeClr val="accent1"/>
-                </a:solidFill>
-              </a14:hiddenFill>
-            </a:ext>
-            <a:ext uri="{91240B29-F687-4F45-9708-019B960494DF}">
-              <a14:hiddenLine xmlns:a14="http://schemas.microsoft.com/office/drawing/2010/main" w="9525">
-                <a:solidFill>
-                  <a:schemeClr val="tx1"/>
-                </a:solidFill>
-                <a:miter lim="800000"/>
-                <a:headEnd/>
-                <a:tailEnd/>
-              </a14:hiddenLine>
-            </a:ext>
-            <a:ext uri="{AF507438-7753-43E0-B8FC-AC1667EBCBE1}">
-              <a14:hiddenEffects xmlns:a14="http://schemas.microsoft.com/office/drawing/2010/main">
-                <a:effectLst>
-                  <a:outerShdw dist="35921" dir="2700000" algn="ctr" rotWithShape="0">
-                    <a:schemeClr val="bg2"/>
-                  </a:outerShdw>
-                </a:effectLst>
-              </a14:hiddenEffects>
-            </a:ext>
-          </a:extLst>
-        </p:spPr>
-        <p:txBody>
-          <a:bodyPr/>
-          <a:lstStyle>
-            <a:lvl1pPr>
-              <a:defRPr kumimoji="1">
-                <a:solidFill>
-                  <a:schemeClr val="tx1"/>
-                </a:solidFill>
-                <a:latin typeface="Tahoma" panose="020B0604030504040204" pitchFamily="34" charset="0"/>
-                <a:ea typeface="新細明體" panose="02020500000000000000" pitchFamily="18" charset="-120"/>
-              </a:defRPr>
-            </a:lvl1pPr>
-            <a:lvl2pPr marL="742950" indent="-285750">
-              <a:defRPr kumimoji="1">
-                <a:solidFill>
-                  <a:schemeClr val="tx1"/>
-                </a:solidFill>
-                <a:latin typeface="Tahoma" panose="020B0604030504040204" pitchFamily="34" charset="0"/>
-                <a:ea typeface="新細明體" panose="02020500000000000000" pitchFamily="18" charset="-120"/>
-              </a:defRPr>
-            </a:lvl2pPr>
-            <a:lvl3pPr marL="1143000" indent="-228600">
-              <a:defRPr kumimoji="1">
-                <a:solidFill>
-                  <a:schemeClr val="tx1"/>
-                </a:solidFill>
-                <a:latin typeface="Tahoma" panose="020B0604030504040204" pitchFamily="34" charset="0"/>
-                <a:ea typeface="新細明體" panose="02020500000000000000" pitchFamily="18" charset="-120"/>
-              </a:defRPr>
-            </a:lvl3pPr>
-            <a:lvl4pPr marL="1600200" indent="-228600">
-              <a:defRPr kumimoji="1">
-                <a:solidFill>
-                  <a:schemeClr val="tx1"/>
-                </a:solidFill>
-                <a:latin typeface="Tahoma" panose="020B0604030504040204" pitchFamily="34" charset="0"/>
-                <a:ea typeface="新細明體" panose="02020500000000000000" pitchFamily="18" charset="-120"/>
-              </a:defRPr>
-            </a:lvl4pPr>
-            <a:lvl5pPr marL="2057400" indent="-228600">
-              <a:defRPr kumimoji="1">
-                <a:solidFill>
-                  <a:schemeClr val="tx1"/>
-                </a:solidFill>
-                <a:latin typeface="Tahoma" panose="020B0604030504040204" pitchFamily="34" charset="0"/>
-                <a:ea typeface="新細明體" panose="02020500000000000000" pitchFamily="18" charset="-120"/>
-              </a:defRPr>
-            </a:lvl5pPr>
-            <a:lvl6pPr marL="2514600" indent="-228600" eaLnBrk="0" fontAlgn="base" hangingPunct="0">
-              <a:spcBef>
-                <a:spcPct val="0"/>
-              </a:spcBef>
-              <a:spcAft>
-                <a:spcPct val="0"/>
-              </a:spcAft>
-              <a:defRPr kumimoji="1">
-                <a:solidFill>
-                  <a:schemeClr val="tx1"/>
-                </a:solidFill>
-                <a:latin typeface="Tahoma" panose="020B0604030504040204" pitchFamily="34" charset="0"/>
-                <a:ea typeface="新細明體" panose="02020500000000000000" pitchFamily="18" charset="-120"/>
-              </a:defRPr>
-            </a:lvl6pPr>
-            <a:lvl7pPr marL="2971800" indent="-228600" eaLnBrk="0" fontAlgn="base" hangingPunct="0">
-              <a:spcBef>
-                <a:spcPct val="0"/>
-              </a:spcBef>
-              <a:spcAft>
-                <a:spcPct val="0"/>
-              </a:spcAft>
-              <a:defRPr kumimoji="1">
-                <a:solidFill>
-                  <a:schemeClr val="tx1"/>
-                </a:solidFill>
-                <a:latin typeface="Tahoma" panose="020B0604030504040204" pitchFamily="34" charset="0"/>
-                <a:ea typeface="新細明體" panose="02020500000000000000" pitchFamily="18" charset="-120"/>
-              </a:defRPr>
-            </a:lvl7pPr>
-            <a:lvl8pPr marL="3429000" indent="-228600" eaLnBrk="0" fontAlgn="base" hangingPunct="0">
-              <a:spcBef>
-                <a:spcPct val="0"/>
-              </a:spcBef>
-              <a:spcAft>
-                <a:spcPct val="0"/>
-              </a:spcAft>
-              <a:defRPr kumimoji="1">
-                <a:solidFill>
-                  <a:schemeClr val="tx1"/>
-                </a:solidFill>
-                <a:latin typeface="Tahoma" panose="020B0604030504040204" pitchFamily="34" charset="0"/>
-                <a:ea typeface="新細明體" panose="02020500000000000000" pitchFamily="18" charset="-120"/>
-              </a:defRPr>
-            </a:lvl8pPr>
-            <a:lvl9pPr marL="3886200" indent="-228600" eaLnBrk="0" fontAlgn="base" hangingPunct="0">
-              <a:spcBef>
-                <a:spcPct val="0"/>
-              </a:spcBef>
-              <a:spcAft>
-                <a:spcPct val="0"/>
-              </a:spcAft>
-              <a:defRPr kumimoji="1">
-                <a:solidFill>
-                  <a:schemeClr val="tx1"/>
-                </a:solidFill>
-                <a:latin typeface="Tahoma" panose="020B0604030504040204" pitchFamily="34" charset="0"/>
-                <a:ea typeface="新細明體" panose="02020500000000000000" pitchFamily="18" charset="-120"/>
-              </a:defRPr>
-            </a:lvl9pPr>
-          </a:lstStyle>
-          <a:p>
-            <a:fld id="{412C34E0-1A46-A243-934C-463288DE37EA}" type="slidenum">
-              <a:rPr kumimoji="0" lang="en-US" altLang="zh-TW"/>
-              <a:pPr/>
-              <a:t>39</a:t>
-            </a:fld>
-            <a:endParaRPr kumimoji="0" lang="en-US" altLang="zh-TW"/>
-          </a:p>
-        </p:txBody>
-      </p:sp>
-      <p:sp>
-        <p:nvSpPr>
-          <p:cNvPr id="29698" name="Rectangle 2">
-            <a:extLst>
-              <a:ext uri="{FF2B5EF4-FFF2-40B4-BE49-F238E27FC236}">
-                <a16:creationId xmlns:a16="http://schemas.microsoft.com/office/drawing/2014/main" id="{F68349DF-0129-0401-413D-657CF2E59E68}"/>
-              </a:ext>
-            </a:extLst>
-          </p:cNvPr>
-          <p:cNvSpPr>
-            <a:spLocks noGrp="1" noChangeArrowheads="1"/>
-          </p:cNvSpPr>
-          <p:nvPr>
-            <p:ph type="title"/>
-          </p:nvPr>
-        </p:nvSpPr>
-        <p:spPr/>
-        <p:txBody>
-          <a:bodyPr/>
-          <a:lstStyle/>
-          <a:p>
-            <a:pPr eaLnBrk="1" hangingPunct="1"/>
-            <a:r>
-              <a:rPr lang="zh-TW" altLang="en-US" dirty="0"/>
-              <a:t>郵寄問卷訪問（三）</a:t>
-            </a:r>
-          </a:p>
-        </p:txBody>
-      </p:sp>
-      <p:sp>
-        <p:nvSpPr>
-          <p:cNvPr id="29699" name="Rectangle 3">
-            <a:extLst>
-              <a:ext uri="{FF2B5EF4-FFF2-40B4-BE49-F238E27FC236}">
-                <a16:creationId xmlns:a16="http://schemas.microsoft.com/office/drawing/2014/main" id="{374EDABE-738F-F7CF-3F8B-3F7F1B579A26}"/>
-              </a:ext>
-            </a:extLst>
-          </p:cNvPr>
-          <p:cNvSpPr>
-            <a:spLocks noGrp="1" noChangeArrowheads="1"/>
-          </p:cNvSpPr>
-          <p:nvPr>
-            <p:ph type="body" idx="1"/>
-          </p:nvPr>
-        </p:nvSpPr>
-        <p:spPr/>
-        <p:txBody>
-          <a:bodyPr/>
-          <a:lstStyle/>
-          <a:p>
-            <a:pPr eaLnBrk="1" hangingPunct="1">
-              <a:lnSpc>
-                <a:spcPct val="90000"/>
-              </a:lnSpc>
-            </a:pPr>
-            <a:r>
-              <a:rPr lang="zh-TW" altLang="en-US" dirty="0"/>
-              <a:t>缺點</a:t>
-            </a:r>
-          </a:p>
-          <a:p>
-            <a:pPr marL="514350" indent="-514350" eaLnBrk="1" hangingPunct="1">
-              <a:lnSpc>
-                <a:spcPct val="150000"/>
-              </a:lnSpc>
-              <a:buFont typeface="+mj-lt"/>
-              <a:buAutoNum type="arabicPeriod"/>
-            </a:pPr>
-            <a:r>
-              <a:rPr lang="zh-TW" altLang="en-US" sz="2000" dirty="0"/>
-              <a:t>樣本代表性不準確：因為是特定樣本，所以很難推論到一般民眾，但是也許可以推論到全體的會員或者公司。</a:t>
-            </a:r>
-            <a:endParaRPr lang="en-US" altLang="zh-TW" sz="2000" dirty="0"/>
-          </a:p>
-          <a:p>
-            <a:pPr marL="514350" indent="-514350" eaLnBrk="1" hangingPunct="1">
-              <a:lnSpc>
-                <a:spcPct val="150000"/>
-              </a:lnSpc>
-              <a:buFont typeface="+mj-lt"/>
-              <a:buAutoNum type="arabicPeriod"/>
-            </a:pPr>
-            <a:r>
-              <a:rPr lang="zh-TW" altLang="en-US" sz="2000" dirty="0"/>
-              <a:t>回收率低：一般來說回收率大約</a:t>
-            </a:r>
-            <a:r>
-              <a:rPr lang="en-US" altLang="zh-TW" sz="2000" dirty="0"/>
-              <a:t>3</a:t>
-            </a:r>
-            <a:r>
-              <a:rPr lang="zh-TW" altLang="en-US" sz="2000" dirty="0"/>
-              <a:t>成，雖然已經比電訪、面訪來得高，仍要一直催收才能達到。</a:t>
-            </a:r>
-            <a:endParaRPr lang="en-US" altLang="zh-TW" sz="2000" dirty="0"/>
-          </a:p>
-          <a:p>
-            <a:pPr marL="514350" indent="-514350" eaLnBrk="1" hangingPunct="1">
-              <a:lnSpc>
-                <a:spcPct val="150000"/>
-              </a:lnSpc>
-              <a:buFont typeface="+mj-lt"/>
-              <a:buAutoNum type="arabicPeriod"/>
-            </a:pPr>
-            <a:r>
-              <a:rPr lang="zh-TW" altLang="en-US" sz="2000" dirty="0"/>
-              <a:t>缺乏訪員協助：受訪者自填時遇到不會的問題沒辦法得到協助。</a:t>
-            </a:r>
-            <a:endParaRPr lang="en-US" altLang="zh-TW" sz="2000" dirty="0"/>
-          </a:p>
-          <a:p>
-            <a:pPr marL="514350" indent="-514350" eaLnBrk="1" hangingPunct="1">
-              <a:lnSpc>
-                <a:spcPct val="150000"/>
-              </a:lnSpc>
-              <a:buFont typeface="+mj-lt"/>
-              <a:buAutoNum type="arabicPeriod"/>
-            </a:pPr>
-            <a:r>
-              <a:rPr lang="zh-TW" altLang="en-US" sz="2000" dirty="0"/>
-              <a:t>不能問政治知識題：如果題目設計有政治知識，或者相關背景，受訪者可以自己找答案，失去效度。</a:t>
-            </a:r>
-          </a:p>
-        </p:txBody>
-      </p:sp>
-    </p:spTree>
-    <p:extLst>
-      <p:ext uri="{BB962C8B-B14F-4D97-AF65-F5344CB8AC3E}">
-        <p14:creationId xmlns:p14="http://schemas.microsoft.com/office/powerpoint/2010/main" val="1456923335"/>
+        <p14:creationId xmlns:p14="http://schemas.microsoft.com/office/powerpoint/2010/main" val="2642656991"/>
       </p:ext>
     </p:extLst>
   </p:cSld>
@@ -28861,6 +28769,964 @@
   <p:cSld>
     <p:spTree>
       <p:nvGrpSpPr>
+        <p:cNvPr id="1" name="">
+          <a:extLst>
+            <a:ext uri="{FF2B5EF4-FFF2-40B4-BE49-F238E27FC236}">
+              <a16:creationId xmlns:a16="http://schemas.microsoft.com/office/drawing/2014/main" id="{4ABFA586-BADE-786D-95AB-C263BE16CA3E}"/>
+            </a:ext>
+          </a:extLst>
+        </p:cNvPr>
+        <p:cNvGrpSpPr/>
+        <p:nvPr/>
+      </p:nvGrpSpPr>
+      <p:grpSpPr>
+        <a:xfrm>
+          <a:off x="0" y="0"/>
+          <a:ext cx="0" cy="0"/>
+          <a:chOff x="0" y="0"/>
+          <a:chExt cx="0" cy="0"/>
+        </a:xfrm>
+      </p:grpSpPr>
+      <p:sp>
+        <p:nvSpPr>
+          <p:cNvPr id="29697" name="Slide Number Placeholder 5">
+            <a:extLst>
+              <a:ext uri="{FF2B5EF4-FFF2-40B4-BE49-F238E27FC236}">
+                <a16:creationId xmlns:a16="http://schemas.microsoft.com/office/drawing/2014/main" id="{8A82BC89-453C-3580-4ED8-80B8E53DA768}"/>
+              </a:ext>
+            </a:extLst>
+          </p:cNvPr>
+          <p:cNvSpPr>
+            <a:spLocks noGrp="1"/>
+          </p:cNvSpPr>
+          <p:nvPr>
+            <p:ph type="sldNum" sz="quarter" idx="12"/>
+          </p:nvPr>
+        </p:nvSpPr>
+        <p:spPr>
+          <a:noFill/>
+          <a:extLst>
+            <a:ext uri="{909E8E84-426E-40DD-AFC4-6F175D3DCCD1}">
+              <a14:hiddenFill xmlns:a14="http://schemas.microsoft.com/office/drawing/2010/main">
+                <a:solidFill>
+                  <a:schemeClr val="accent1"/>
+                </a:solidFill>
+              </a14:hiddenFill>
+            </a:ext>
+            <a:ext uri="{91240B29-F687-4F45-9708-019B960494DF}">
+              <a14:hiddenLine xmlns:a14="http://schemas.microsoft.com/office/drawing/2010/main" w="9525">
+                <a:solidFill>
+                  <a:schemeClr val="tx1"/>
+                </a:solidFill>
+                <a:miter lim="800000"/>
+                <a:headEnd/>
+                <a:tailEnd/>
+              </a14:hiddenLine>
+            </a:ext>
+            <a:ext uri="{AF507438-7753-43E0-B8FC-AC1667EBCBE1}">
+              <a14:hiddenEffects xmlns:a14="http://schemas.microsoft.com/office/drawing/2010/main">
+                <a:effectLst>
+                  <a:outerShdw dist="35921" dir="2700000" algn="ctr" rotWithShape="0">
+                    <a:schemeClr val="bg2"/>
+                  </a:outerShdw>
+                </a:effectLst>
+              </a14:hiddenEffects>
+            </a:ext>
+          </a:extLst>
+        </p:spPr>
+        <p:txBody>
+          <a:bodyPr/>
+          <a:lstStyle>
+            <a:lvl1pPr>
+              <a:defRPr kumimoji="1">
+                <a:solidFill>
+                  <a:schemeClr val="tx1"/>
+                </a:solidFill>
+                <a:latin typeface="Tahoma" panose="020B0604030504040204" pitchFamily="34" charset="0"/>
+                <a:ea typeface="新細明體" panose="02020500000000000000" pitchFamily="18" charset="-120"/>
+              </a:defRPr>
+            </a:lvl1pPr>
+            <a:lvl2pPr marL="742950" indent="-285750">
+              <a:defRPr kumimoji="1">
+                <a:solidFill>
+                  <a:schemeClr val="tx1"/>
+                </a:solidFill>
+                <a:latin typeface="Tahoma" panose="020B0604030504040204" pitchFamily="34" charset="0"/>
+                <a:ea typeface="新細明體" panose="02020500000000000000" pitchFamily="18" charset="-120"/>
+              </a:defRPr>
+            </a:lvl2pPr>
+            <a:lvl3pPr marL="1143000" indent="-228600">
+              <a:defRPr kumimoji="1">
+                <a:solidFill>
+                  <a:schemeClr val="tx1"/>
+                </a:solidFill>
+                <a:latin typeface="Tahoma" panose="020B0604030504040204" pitchFamily="34" charset="0"/>
+                <a:ea typeface="新細明體" panose="02020500000000000000" pitchFamily="18" charset="-120"/>
+              </a:defRPr>
+            </a:lvl3pPr>
+            <a:lvl4pPr marL="1600200" indent="-228600">
+              <a:defRPr kumimoji="1">
+                <a:solidFill>
+                  <a:schemeClr val="tx1"/>
+                </a:solidFill>
+                <a:latin typeface="Tahoma" panose="020B0604030504040204" pitchFamily="34" charset="0"/>
+                <a:ea typeface="新細明體" panose="02020500000000000000" pitchFamily="18" charset="-120"/>
+              </a:defRPr>
+            </a:lvl4pPr>
+            <a:lvl5pPr marL="2057400" indent="-228600">
+              <a:defRPr kumimoji="1">
+                <a:solidFill>
+                  <a:schemeClr val="tx1"/>
+                </a:solidFill>
+                <a:latin typeface="Tahoma" panose="020B0604030504040204" pitchFamily="34" charset="0"/>
+                <a:ea typeface="新細明體" panose="02020500000000000000" pitchFamily="18" charset="-120"/>
+              </a:defRPr>
+            </a:lvl5pPr>
+            <a:lvl6pPr marL="2514600" indent="-228600" eaLnBrk="0" fontAlgn="base" hangingPunct="0">
+              <a:spcBef>
+                <a:spcPct val="0"/>
+              </a:spcBef>
+              <a:spcAft>
+                <a:spcPct val="0"/>
+              </a:spcAft>
+              <a:defRPr kumimoji="1">
+                <a:solidFill>
+                  <a:schemeClr val="tx1"/>
+                </a:solidFill>
+                <a:latin typeface="Tahoma" panose="020B0604030504040204" pitchFamily="34" charset="0"/>
+                <a:ea typeface="新細明體" panose="02020500000000000000" pitchFamily="18" charset="-120"/>
+              </a:defRPr>
+            </a:lvl6pPr>
+            <a:lvl7pPr marL="2971800" indent="-228600" eaLnBrk="0" fontAlgn="base" hangingPunct="0">
+              <a:spcBef>
+                <a:spcPct val="0"/>
+              </a:spcBef>
+              <a:spcAft>
+                <a:spcPct val="0"/>
+              </a:spcAft>
+              <a:defRPr kumimoji="1">
+                <a:solidFill>
+                  <a:schemeClr val="tx1"/>
+                </a:solidFill>
+                <a:latin typeface="Tahoma" panose="020B0604030504040204" pitchFamily="34" charset="0"/>
+                <a:ea typeface="新細明體" panose="02020500000000000000" pitchFamily="18" charset="-120"/>
+              </a:defRPr>
+            </a:lvl7pPr>
+            <a:lvl8pPr marL="3429000" indent="-228600" eaLnBrk="0" fontAlgn="base" hangingPunct="0">
+              <a:spcBef>
+                <a:spcPct val="0"/>
+              </a:spcBef>
+              <a:spcAft>
+                <a:spcPct val="0"/>
+              </a:spcAft>
+              <a:defRPr kumimoji="1">
+                <a:solidFill>
+                  <a:schemeClr val="tx1"/>
+                </a:solidFill>
+                <a:latin typeface="Tahoma" panose="020B0604030504040204" pitchFamily="34" charset="0"/>
+                <a:ea typeface="新細明體" panose="02020500000000000000" pitchFamily="18" charset="-120"/>
+              </a:defRPr>
+            </a:lvl8pPr>
+            <a:lvl9pPr marL="3886200" indent="-228600" eaLnBrk="0" fontAlgn="base" hangingPunct="0">
+              <a:spcBef>
+                <a:spcPct val="0"/>
+              </a:spcBef>
+              <a:spcAft>
+                <a:spcPct val="0"/>
+              </a:spcAft>
+              <a:defRPr kumimoji="1">
+                <a:solidFill>
+                  <a:schemeClr val="tx1"/>
+                </a:solidFill>
+                <a:latin typeface="Tahoma" panose="020B0604030504040204" pitchFamily="34" charset="0"/>
+                <a:ea typeface="新細明體" panose="02020500000000000000" pitchFamily="18" charset="-120"/>
+              </a:defRPr>
+            </a:lvl9pPr>
+          </a:lstStyle>
+          <a:p>
+            <a:fld id="{412C34E0-1A46-A243-934C-463288DE37EA}" type="slidenum">
+              <a:rPr kumimoji="0" lang="en-US" altLang="zh-TW"/>
+              <a:pPr/>
+              <a:t>40</a:t>
+            </a:fld>
+            <a:endParaRPr kumimoji="0" lang="en-US" altLang="zh-TW"/>
+          </a:p>
+        </p:txBody>
+      </p:sp>
+      <p:sp>
+        <p:nvSpPr>
+          <p:cNvPr id="29698" name="Rectangle 2">
+            <a:extLst>
+              <a:ext uri="{FF2B5EF4-FFF2-40B4-BE49-F238E27FC236}">
+                <a16:creationId xmlns:a16="http://schemas.microsoft.com/office/drawing/2014/main" id="{BEDC186A-406B-3CE4-B94E-99225FADA806}"/>
+              </a:ext>
+            </a:extLst>
+          </p:cNvPr>
+          <p:cNvSpPr>
+            <a:spLocks noGrp="1" noChangeArrowheads="1"/>
+          </p:cNvSpPr>
+          <p:nvPr>
+            <p:ph type="title"/>
+          </p:nvPr>
+        </p:nvSpPr>
+        <p:spPr/>
+        <p:txBody>
+          <a:bodyPr/>
+          <a:lstStyle/>
+          <a:p>
+            <a:pPr eaLnBrk="1" hangingPunct="1"/>
+            <a:r>
+              <a:rPr lang="zh-TW" altLang="en-US" dirty="0"/>
+              <a:t>郵寄問卷訪問（三）</a:t>
+            </a:r>
+          </a:p>
+        </p:txBody>
+      </p:sp>
+      <p:sp>
+        <p:nvSpPr>
+          <p:cNvPr id="29699" name="Rectangle 3">
+            <a:extLst>
+              <a:ext uri="{FF2B5EF4-FFF2-40B4-BE49-F238E27FC236}">
+                <a16:creationId xmlns:a16="http://schemas.microsoft.com/office/drawing/2014/main" id="{C32955E0-BFBD-ACCB-B5C7-12007E2507DA}"/>
+              </a:ext>
+            </a:extLst>
+          </p:cNvPr>
+          <p:cNvSpPr>
+            <a:spLocks noGrp="1" noChangeArrowheads="1"/>
+          </p:cNvSpPr>
+          <p:nvPr>
+            <p:ph type="body" idx="1"/>
+          </p:nvPr>
+        </p:nvSpPr>
+        <p:spPr/>
+        <p:txBody>
+          <a:bodyPr/>
+          <a:lstStyle/>
+          <a:p>
+            <a:pPr eaLnBrk="1" hangingPunct="1">
+              <a:lnSpc>
+                <a:spcPct val="90000"/>
+              </a:lnSpc>
+            </a:pPr>
+            <a:r>
+              <a:rPr lang="zh-TW" altLang="en-US" dirty="0"/>
+              <a:t>優點</a:t>
+            </a:r>
+          </a:p>
+          <a:p>
+            <a:pPr marL="514350" indent="-514350" eaLnBrk="1" hangingPunct="1">
+              <a:lnSpc>
+                <a:spcPct val="150000"/>
+              </a:lnSpc>
+              <a:buFont typeface="+mj-lt"/>
+              <a:buAutoNum type="arabicPeriod"/>
+            </a:pPr>
+            <a:r>
+              <a:rPr lang="zh-TW" altLang="en-US" sz="2000" dirty="0"/>
+              <a:t>訪問成本低：不需要訪員，也不需要電訪設備。</a:t>
+            </a:r>
+            <a:endParaRPr lang="en-US" altLang="zh-TW" sz="2000" dirty="0"/>
+          </a:p>
+          <a:p>
+            <a:pPr marL="514350" indent="-514350" eaLnBrk="1" hangingPunct="1">
+              <a:lnSpc>
+                <a:spcPct val="150000"/>
+              </a:lnSpc>
+              <a:buFont typeface="+mj-lt"/>
+              <a:buAutoNum type="arabicPeriod"/>
+            </a:pPr>
+            <a:r>
+              <a:rPr lang="zh-TW" altLang="en-US" sz="2000" dirty="0"/>
+              <a:t>受訪者自填，所以可以詢問比較敏感的問題，但是要讓受訪者相信研究者會保護受訪者的答案與個資。</a:t>
+            </a:r>
+            <a:endParaRPr lang="en-US" altLang="zh-TW" sz="2000" dirty="0"/>
+          </a:p>
+          <a:p>
+            <a:pPr marL="514350" indent="-514350" eaLnBrk="1" hangingPunct="1">
+              <a:lnSpc>
+                <a:spcPct val="150000"/>
+              </a:lnSpc>
+              <a:buFont typeface="+mj-lt"/>
+              <a:buAutoNum type="arabicPeriod"/>
+            </a:pPr>
+            <a:r>
+              <a:rPr lang="ja-JP" altLang="en-US" sz="2000"/>
+              <a:t>受訪者可以看到完整的題目與選項，不容易受訪員語氣影響，但容易受到排版、字體大小或問題順序的心理暗示。</a:t>
+            </a:r>
+            <a:endParaRPr lang="en-US" altLang="zh-TW" sz="2000" dirty="0"/>
+          </a:p>
+          <a:p>
+            <a:pPr marL="514350" indent="-514350" eaLnBrk="1" hangingPunct="1">
+              <a:lnSpc>
+                <a:spcPct val="150000"/>
+              </a:lnSpc>
+              <a:buFont typeface="+mj-lt"/>
+              <a:buAutoNum type="arabicPeriod"/>
+            </a:pPr>
+            <a:r>
+              <a:rPr lang="zh-TW" altLang="en-US" sz="2000" dirty="0"/>
+              <a:t>問卷內容較電訪寬裕，但是也不能過長，使受訪者中途拒訪。</a:t>
+            </a:r>
+            <a:endParaRPr lang="en-US" altLang="zh-TW" sz="2000" dirty="0"/>
+          </a:p>
+          <a:p>
+            <a:pPr marL="514350" indent="-514350" eaLnBrk="1" hangingPunct="1">
+              <a:lnSpc>
+                <a:spcPct val="150000"/>
+              </a:lnSpc>
+              <a:buFont typeface="+mj-lt"/>
+              <a:buAutoNum type="arabicPeriod"/>
+            </a:pPr>
+            <a:r>
+              <a:rPr lang="zh-TW" altLang="en-US" sz="2000" dirty="0"/>
+              <a:t>可以附上誘因，提高受訪者的動機。</a:t>
+            </a:r>
+          </a:p>
+        </p:txBody>
+      </p:sp>
+    </p:spTree>
+    <p:extLst>
+      <p:ext uri="{BB962C8B-B14F-4D97-AF65-F5344CB8AC3E}">
+        <p14:creationId xmlns:p14="http://schemas.microsoft.com/office/powerpoint/2010/main" val="1124606773"/>
+      </p:ext>
+    </p:extLst>
+  </p:cSld>
+  <p:clrMapOvr>
+    <a:masterClrMapping/>
+  </p:clrMapOvr>
+</p:sld>
+</file>
+
+<file path=ppt/slides/slide41.xml><?xml version="1.0" encoding="utf-8"?>
+<p:sld xmlns:a="http://schemas.openxmlformats.org/drawingml/2006/main" xmlns:r="http://schemas.openxmlformats.org/officeDocument/2006/relationships" xmlns:p="http://schemas.openxmlformats.org/presentationml/2006/main">
+  <p:cSld>
+    <p:spTree>
+      <p:nvGrpSpPr>
+        <p:cNvPr id="1" name="">
+          <a:extLst>
+            <a:ext uri="{FF2B5EF4-FFF2-40B4-BE49-F238E27FC236}">
+              <a16:creationId xmlns:a16="http://schemas.microsoft.com/office/drawing/2014/main" id="{529C895C-DA7C-E622-6E4A-1E9EF95BCBA5}"/>
+            </a:ext>
+          </a:extLst>
+        </p:cNvPr>
+        <p:cNvGrpSpPr/>
+        <p:nvPr/>
+      </p:nvGrpSpPr>
+      <p:grpSpPr>
+        <a:xfrm>
+          <a:off x="0" y="0"/>
+          <a:ext cx="0" cy="0"/>
+          <a:chOff x="0" y="0"/>
+          <a:chExt cx="0" cy="0"/>
+        </a:xfrm>
+      </p:grpSpPr>
+      <p:sp>
+        <p:nvSpPr>
+          <p:cNvPr id="29697" name="Slide Number Placeholder 5">
+            <a:extLst>
+              <a:ext uri="{FF2B5EF4-FFF2-40B4-BE49-F238E27FC236}">
+                <a16:creationId xmlns:a16="http://schemas.microsoft.com/office/drawing/2014/main" id="{2A7C20BE-F70C-47E7-2315-881B76BBD918}"/>
+              </a:ext>
+            </a:extLst>
+          </p:cNvPr>
+          <p:cNvSpPr>
+            <a:spLocks noGrp="1"/>
+          </p:cNvSpPr>
+          <p:nvPr>
+            <p:ph type="sldNum" sz="quarter" idx="12"/>
+          </p:nvPr>
+        </p:nvSpPr>
+        <p:spPr>
+          <a:noFill/>
+          <a:extLst>
+            <a:ext uri="{909E8E84-426E-40DD-AFC4-6F175D3DCCD1}">
+              <a14:hiddenFill xmlns:a14="http://schemas.microsoft.com/office/drawing/2010/main">
+                <a:solidFill>
+                  <a:schemeClr val="accent1"/>
+                </a:solidFill>
+              </a14:hiddenFill>
+            </a:ext>
+            <a:ext uri="{91240B29-F687-4F45-9708-019B960494DF}">
+              <a14:hiddenLine xmlns:a14="http://schemas.microsoft.com/office/drawing/2010/main" w="9525">
+                <a:solidFill>
+                  <a:schemeClr val="tx1"/>
+                </a:solidFill>
+                <a:miter lim="800000"/>
+                <a:headEnd/>
+                <a:tailEnd/>
+              </a14:hiddenLine>
+            </a:ext>
+            <a:ext uri="{AF507438-7753-43E0-B8FC-AC1667EBCBE1}">
+              <a14:hiddenEffects xmlns:a14="http://schemas.microsoft.com/office/drawing/2010/main">
+                <a:effectLst>
+                  <a:outerShdw dist="35921" dir="2700000" algn="ctr" rotWithShape="0">
+                    <a:schemeClr val="bg2"/>
+                  </a:outerShdw>
+                </a:effectLst>
+              </a14:hiddenEffects>
+            </a:ext>
+          </a:extLst>
+        </p:spPr>
+        <p:txBody>
+          <a:bodyPr/>
+          <a:lstStyle>
+            <a:lvl1pPr>
+              <a:defRPr kumimoji="1">
+                <a:solidFill>
+                  <a:schemeClr val="tx1"/>
+                </a:solidFill>
+                <a:latin typeface="Tahoma" panose="020B0604030504040204" pitchFamily="34" charset="0"/>
+                <a:ea typeface="新細明體" panose="02020500000000000000" pitchFamily="18" charset="-120"/>
+              </a:defRPr>
+            </a:lvl1pPr>
+            <a:lvl2pPr marL="742950" indent="-285750">
+              <a:defRPr kumimoji="1">
+                <a:solidFill>
+                  <a:schemeClr val="tx1"/>
+                </a:solidFill>
+                <a:latin typeface="Tahoma" panose="020B0604030504040204" pitchFamily="34" charset="0"/>
+                <a:ea typeface="新細明體" panose="02020500000000000000" pitchFamily="18" charset="-120"/>
+              </a:defRPr>
+            </a:lvl2pPr>
+            <a:lvl3pPr marL="1143000" indent="-228600">
+              <a:defRPr kumimoji="1">
+                <a:solidFill>
+                  <a:schemeClr val="tx1"/>
+                </a:solidFill>
+                <a:latin typeface="Tahoma" panose="020B0604030504040204" pitchFamily="34" charset="0"/>
+                <a:ea typeface="新細明體" panose="02020500000000000000" pitchFamily="18" charset="-120"/>
+              </a:defRPr>
+            </a:lvl3pPr>
+            <a:lvl4pPr marL="1600200" indent="-228600">
+              <a:defRPr kumimoji="1">
+                <a:solidFill>
+                  <a:schemeClr val="tx1"/>
+                </a:solidFill>
+                <a:latin typeface="Tahoma" panose="020B0604030504040204" pitchFamily="34" charset="0"/>
+                <a:ea typeface="新細明體" panose="02020500000000000000" pitchFamily="18" charset="-120"/>
+              </a:defRPr>
+            </a:lvl4pPr>
+            <a:lvl5pPr marL="2057400" indent="-228600">
+              <a:defRPr kumimoji="1">
+                <a:solidFill>
+                  <a:schemeClr val="tx1"/>
+                </a:solidFill>
+                <a:latin typeface="Tahoma" panose="020B0604030504040204" pitchFamily="34" charset="0"/>
+                <a:ea typeface="新細明體" panose="02020500000000000000" pitchFamily="18" charset="-120"/>
+              </a:defRPr>
+            </a:lvl5pPr>
+            <a:lvl6pPr marL="2514600" indent="-228600" eaLnBrk="0" fontAlgn="base" hangingPunct="0">
+              <a:spcBef>
+                <a:spcPct val="0"/>
+              </a:spcBef>
+              <a:spcAft>
+                <a:spcPct val="0"/>
+              </a:spcAft>
+              <a:defRPr kumimoji="1">
+                <a:solidFill>
+                  <a:schemeClr val="tx1"/>
+                </a:solidFill>
+                <a:latin typeface="Tahoma" panose="020B0604030504040204" pitchFamily="34" charset="0"/>
+                <a:ea typeface="新細明體" panose="02020500000000000000" pitchFamily="18" charset="-120"/>
+              </a:defRPr>
+            </a:lvl6pPr>
+            <a:lvl7pPr marL="2971800" indent="-228600" eaLnBrk="0" fontAlgn="base" hangingPunct="0">
+              <a:spcBef>
+                <a:spcPct val="0"/>
+              </a:spcBef>
+              <a:spcAft>
+                <a:spcPct val="0"/>
+              </a:spcAft>
+              <a:defRPr kumimoji="1">
+                <a:solidFill>
+                  <a:schemeClr val="tx1"/>
+                </a:solidFill>
+                <a:latin typeface="Tahoma" panose="020B0604030504040204" pitchFamily="34" charset="0"/>
+                <a:ea typeface="新細明體" panose="02020500000000000000" pitchFamily="18" charset="-120"/>
+              </a:defRPr>
+            </a:lvl7pPr>
+            <a:lvl8pPr marL="3429000" indent="-228600" eaLnBrk="0" fontAlgn="base" hangingPunct="0">
+              <a:spcBef>
+                <a:spcPct val="0"/>
+              </a:spcBef>
+              <a:spcAft>
+                <a:spcPct val="0"/>
+              </a:spcAft>
+              <a:defRPr kumimoji="1">
+                <a:solidFill>
+                  <a:schemeClr val="tx1"/>
+                </a:solidFill>
+                <a:latin typeface="Tahoma" panose="020B0604030504040204" pitchFamily="34" charset="0"/>
+                <a:ea typeface="新細明體" panose="02020500000000000000" pitchFamily="18" charset="-120"/>
+              </a:defRPr>
+            </a:lvl8pPr>
+            <a:lvl9pPr marL="3886200" indent="-228600" eaLnBrk="0" fontAlgn="base" hangingPunct="0">
+              <a:spcBef>
+                <a:spcPct val="0"/>
+              </a:spcBef>
+              <a:spcAft>
+                <a:spcPct val="0"/>
+              </a:spcAft>
+              <a:defRPr kumimoji="1">
+                <a:solidFill>
+                  <a:schemeClr val="tx1"/>
+                </a:solidFill>
+                <a:latin typeface="Tahoma" panose="020B0604030504040204" pitchFamily="34" charset="0"/>
+                <a:ea typeface="新細明體" panose="02020500000000000000" pitchFamily="18" charset="-120"/>
+              </a:defRPr>
+            </a:lvl9pPr>
+          </a:lstStyle>
+          <a:p>
+            <a:fld id="{412C34E0-1A46-A243-934C-463288DE37EA}" type="slidenum">
+              <a:rPr kumimoji="0" lang="en-US" altLang="zh-TW"/>
+              <a:pPr/>
+              <a:t>41</a:t>
+            </a:fld>
+            <a:endParaRPr kumimoji="0" lang="en-US" altLang="zh-TW"/>
+          </a:p>
+        </p:txBody>
+      </p:sp>
+      <p:sp>
+        <p:nvSpPr>
+          <p:cNvPr id="29698" name="Rectangle 2">
+            <a:extLst>
+              <a:ext uri="{FF2B5EF4-FFF2-40B4-BE49-F238E27FC236}">
+                <a16:creationId xmlns:a16="http://schemas.microsoft.com/office/drawing/2014/main" id="{F68349DF-0129-0401-413D-657CF2E59E68}"/>
+              </a:ext>
+            </a:extLst>
+          </p:cNvPr>
+          <p:cNvSpPr>
+            <a:spLocks noGrp="1" noChangeArrowheads="1"/>
+          </p:cNvSpPr>
+          <p:nvPr>
+            <p:ph type="title"/>
+          </p:nvPr>
+        </p:nvSpPr>
+        <p:spPr/>
+        <p:txBody>
+          <a:bodyPr/>
+          <a:lstStyle/>
+          <a:p>
+            <a:pPr eaLnBrk="1" hangingPunct="1"/>
+            <a:r>
+              <a:rPr lang="zh-TW" altLang="en-US" dirty="0"/>
+              <a:t>郵寄問卷訪問（四）</a:t>
+            </a:r>
+          </a:p>
+        </p:txBody>
+      </p:sp>
+      <p:sp>
+        <p:nvSpPr>
+          <p:cNvPr id="29699" name="Rectangle 3">
+            <a:extLst>
+              <a:ext uri="{FF2B5EF4-FFF2-40B4-BE49-F238E27FC236}">
+                <a16:creationId xmlns:a16="http://schemas.microsoft.com/office/drawing/2014/main" id="{374EDABE-738F-F7CF-3F8B-3F7F1B579A26}"/>
+              </a:ext>
+            </a:extLst>
+          </p:cNvPr>
+          <p:cNvSpPr>
+            <a:spLocks noGrp="1" noChangeArrowheads="1"/>
+          </p:cNvSpPr>
+          <p:nvPr>
+            <p:ph type="body" idx="1"/>
+          </p:nvPr>
+        </p:nvSpPr>
+        <p:spPr/>
+        <p:txBody>
+          <a:bodyPr/>
+          <a:lstStyle/>
+          <a:p>
+            <a:pPr eaLnBrk="1" hangingPunct="1">
+              <a:lnSpc>
+                <a:spcPct val="90000"/>
+              </a:lnSpc>
+            </a:pPr>
+            <a:r>
+              <a:rPr lang="zh-TW" altLang="en-US" dirty="0"/>
+              <a:t>缺點</a:t>
+            </a:r>
+          </a:p>
+          <a:p>
+            <a:pPr marL="514350" indent="-514350" eaLnBrk="1" hangingPunct="1">
+              <a:lnSpc>
+                <a:spcPct val="150000"/>
+              </a:lnSpc>
+              <a:buFont typeface="+mj-lt"/>
+              <a:buAutoNum type="arabicPeriod"/>
+            </a:pPr>
+            <a:r>
+              <a:rPr lang="zh-TW" altLang="en-US" sz="2000" dirty="0"/>
+              <a:t>樣本代表性不準確：因為是特定樣本，所以很難推論到一般民眾，但是也許可以推論到全體的會員或者公司。</a:t>
+            </a:r>
+            <a:endParaRPr lang="en-US" altLang="zh-TW" sz="2000" dirty="0"/>
+          </a:p>
+          <a:p>
+            <a:pPr marL="514350" indent="-514350" eaLnBrk="1" hangingPunct="1">
+              <a:lnSpc>
+                <a:spcPct val="150000"/>
+              </a:lnSpc>
+              <a:buFont typeface="+mj-lt"/>
+              <a:buAutoNum type="arabicPeriod"/>
+            </a:pPr>
+            <a:r>
+              <a:rPr lang="zh-TW" altLang="en-US" sz="2000" dirty="0"/>
+              <a:t>回收率低：一般來說回收率大約</a:t>
+            </a:r>
+            <a:r>
+              <a:rPr lang="en-US" altLang="zh-TW" sz="2000" dirty="0"/>
+              <a:t>3</a:t>
+            </a:r>
+            <a:r>
+              <a:rPr lang="zh-TW" altLang="en-US" sz="2000" dirty="0"/>
+              <a:t>成，雖然已經比電訪、面訪來得高，仍要一直催收才能達到。</a:t>
+            </a:r>
+            <a:endParaRPr lang="en-US" altLang="zh-TW" sz="2000" dirty="0"/>
+          </a:p>
+          <a:p>
+            <a:pPr marL="514350" indent="-514350" eaLnBrk="1" hangingPunct="1">
+              <a:lnSpc>
+                <a:spcPct val="150000"/>
+              </a:lnSpc>
+              <a:buFont typeface="+mj-lt"/>
+              <a:buAutoNum type="arabicPeriod"/>
+            </a:pPr>
+            <a:r>
+              <a:rPr lang="zh-TW" altLang="en-US" sz="2000" dirty="0"/>
+              <a:t>缺乏訪員協助：受訪者自填時遇到不會的問題沒辦法得到協助。</a:t>
+            </a:r>
+            <a:endParaRPr lang="en-US" altLang="zh-TW" sz="2000" dirty="0"/>
+          </a:p>
+          <a:p>
+            <a:pPr marL="514350" indent="-514350" eaLnBrk="1" hangingPunct="1">
+              <a:lnSpc>
+                <a:spcPct val="150000"/>
+              </a:lnSpc>
+              <a:buFont typeface="+mj-lt"/>
+              <a:buAutoNum type="arabicPeriod"/>
+            </a:pPr>
+            <a:r>
+              <a:rPr lang="zh-TW" altLang="en-US" sz="2000" dirty="0"/>
+              <a:t>不能問政治知識題：如果題目設計有政治知識，或者相關背景，受訪者可以自己找答案，失去效度。</a:t>
+            </a:r>
+          </a:p>
+        </p:txBody>
+      </p:sp>
+    </p:spTree>
+    <p:extLst>
+      <p:ext uri="{BB962C8B-B14F-4D97-AF65-F5344CB8AC3E}">
+        <p14:creationId xmlns:p14="http://schemas.microsoft.com/office/powerpoint/2010/main" val="1456923335"/>
+      </p:ext>
+    </p:extLst>
+  </p:cSld>
+  <p:clrMapOvr>
+    <a:masterClrMapping/>
+  </p:clrMapOvr>
+</p:sld>
+</file>
+
+<file path=ppt/slides/slide42.xml><?xml version="1.0" encoding="utf-8"?>
+<p:sld xmlns:a="http://schemas.openxmlformats.org/drawingml/2006/main" xmlns:r="http://schemas.openxmlformats.org/officeDocument/2006/relationships" xmlns:p="http://schemas.openxmlformats.org/presentationml/2006/main">
+  <p:cSld>
+    <p:spTree>
+      <p:nvGrpSpPr>
+        <p:cNvPr id="1" name="">
+          <a:extLst>
+            <a:ext uri="{FF2B5EF4-FFF2-40B4-BE49-F238E27FC236}">
+              <a16:creationId xmlns:a16="http://schemas.microsoft.com/office/drawing/2014/main" id="{529C895C-DA7C-E622-6E4A-1E9EF95BCBA5}"/>
+            </a:ext>
+          </a:extLst>
+        </p:cNvPr>
+        <p:cNvGrpSpPr/>
+        <p:nvPr/>
+      </p:nvGrpSpPr>
+      <p:grpSpPr>
+        <a:xfrm>
+          <a:off x="0" y="0"/>
+          <a:ext cx="0" cy="0"/>
+          <a:chOff x="0" y="0"/>
+          <a:chExt cx="0" cy="0"/>
+        </a:xfrm>
+      </p:grpSpPr>
+      <p:sp>
+        <p:nvSpPr>
+          <p:cNvPr id="29697" name="Slide Number Placeholder 5">
+            <a:extLst>
+              <a:ext uri="{FF2B5EF4-FFF2-40B4-BE49-F238E27FC236}">
+                <a16:creationId xmlns:a16="http://schemas.microsoft.com/office/drawing/2014/main" id="{2A7C20BE-F70C-47E7-2315-881B76BBD918}"/>
+              </a:ext>
+            </a:extLst>
+          </p:cNvPr>
+          <p:cNvSpPr>
+            <a:spLocks noGrp="1"/>
+          </p:cNvSpPr>
+          <p:nvPr>
+            <p:ph type="sldNum" sz="quarter" idx="12"/>
+          </p:nvPr>
+        </p:nvSpPr>
+        <p:spPr>
+          <a:noFill/>
+          <a:extLst>
+            <a:ext uri="{909E8E84-426E-40DD-AFC4-6F175D3DCCD1}">
+              <a14:hiddenFill xmlns:a14="http://schemas.microsoft.com/office/drawing/2010/main">
+                <a:solidFill>
+                  <a:schemeClr val="accent1"/>
+                </a:solidFill>
+              </a14:hiddenFill>
+            </a:ext>
+            <a:ext uri="{91240B29-F687-4F45-9708-019B960494DF}">
+              <a14:hiddenLine xmlns:a14="http://schemas.microsoft.com/office/drawing/2010/main" w="9525">
+                <a:solidFill>
+                  <a:schemeClr val="tx1"/>
+                </a:solidFill>
+                <a:miter lim="800000"/>
+                <a:headEnd/>
+                <a:tailEnd/>
+              </a14:hiddenLine>
+            </a:ext>
+            <a:ext uri="{AF507438-7753-43E0-B8FC-AC1667EBCBE1}">
+              <a14:hiddenEffects xmlns:a14="http://schemas.microsoft.com/office/drawing/2010/main">
+                <a:effectLst>
+                  <a:outerShdw dist="35921" dir="2700000" algn="ctr" rotWithShape="0">
+                    <a:schemeClr val="bg2"/>
+                  </a:outerShdw>
+                </a:effectLst>
+              </a14:hiddenEffects>
+            </a:ext>
+          </a:extLst>
+        </p:spPr>
+        <p:txBody>
+          <a:bodyPr/>
+          <a:lstStyle>
+            <a:lvl1pPr>
+              <a:defRPr kumimoji="1">
+                <a:solidFill>
+                  <a:schemeClr val="tx1"/>
+                </a:solidFill>
+                <a:latin typeface="Tahoma" panose="020B0604030504040204" pitchFamily="34" charset="0"/>
+                <a:ea typeface="新細明體" panose="02020500000000000000" pitchFamily="18" charset="-120"/>
+              </a:defRPr>
+            </a:lvl1pPr>
+            <a:lvl2pPr marL="742950" indent="-285750">
+              <a:defRPr kumimoji="1">
+                <a:solidFill>
+                  <a:schemeClr val="tx1"/>
+                </a:solidFill>
+                <a:latin typeface="Tahoma" panose="020B0604030504040204" pitchFamily="34" charset="0"/>
+                <a:ea typeface="新細明體" panose="02020500000000000000" pitchFamily="18" charset="-120"/>
+              </a:defRPr>
+            </a:lvl2pPr>
+            <a:lvl3pPr marL="1143000" indent="-228600">
+              <a:defRPr kumimoji="1">
+                <a:solidFill>
+                  <a:schemeClr val="tx1"/>
+                </a:solidFill>
+                <a:latin typeface="Tahoma" panose="020B0604030504040204" pitchFamily="34" charset="0"/>
+                <a:ea typeface="新細明體" panose="02020500000000000000" pitchFamily="18" charset="-120"/>
+              </a:defRPr>
+            </a:lvl3pPr>
+            <a:lvl4pPr marL="1600200" indent="-228600">
+              <a:defRPr kumimoji="1">
+                <a:solidFill>
+                  <a:schemeClr val="tx1"/>
+                </a:solidFill>
+                <a:latin typeface="Tahoma" panose="020B0604030504040204" pitchFamily="34" charset="0"/>
+                <a:ea typeface="新細明體" panose="02020500000000000000" pitchFamily="18" charset="-120"/>
+              </a:defRPr>
+            </a:lvl4pPr>
+            <a:lvl5pPr marL="2057400" indent="-228600">
+              <a:defRPr kumimoji="1">
+                <a:solidFill>
+                  <a:schemeClr val="tx1"/>
+                </a:solidFill>
+                <a:latin typeface="Tahoma" panose="020B0604030504040204" pitchFamily="34" charset="0"/>
+                <a:ea typeface="新細明體" panose="02020500000000000000" pitchFamily="18" charset="-120"/>
+              </a:defRPr>
+            </a:lvl5pPr>
+            <a:lvl6pPr marL="2514600" indent="-228600" eaLnBrk="0" fontAlgn="base" hangingPunct="0">
+              <a:spcBef>
+                <a:spcPct val="0"/>
+              </a:spcBef>
+              <a:spcAft>
+                <a:spcPct val="0"/>
+              </a:spcAft>
+              <a:defRPr kumimoji="1">
+                <a:solidFill>
+                  <a:schemeClr val="tx1"/>
+                </a:solidFill>
+                <a:latin typeface="Tahoma" panose="020B0604030504040204" pitchFamily="34" charset="0"/>
+                <a:ea typeface="新細明體" panose="02020500000000000000" pitchFamily="18" charset="-120"/>
+              </a:defRPr>
+            </a:lvl6pPr>
+            <a:lvl7pPr marL="2971800" indent="-228600" eaLnBrk="0" fontAlgn="base" hangingPunct="0">
+              <a:spcBef>
+                <a:spcPct val="0"/>
+              </a:spcBef>
+              <a:spcAft>
+                <a:spcPct val="0"/>
+              </a:spcAft>
+              <a:defRPr kumimoji="1">
+                <a:solidFill>
+                  <a:schemeClr val="tx1"/>
+                </a:solidFill>
+                <a:latin typeface="Tahoma" panose="020B0604030504040204" pitchFamily="34" charset="0"/>
+                <a:ea typeface="新細明體" panose="02020500000000000000" pitchFamily="18" charset="-120"/>
+              </a:defRPr>
+            </a:lvl7pPr>
+            <a:lvl8pPr marL="3429000" indent="-228600" eaLnBrk="0" fontAlgn="base" hangingPunct="0">
+              <a:spcBef>
+                <a:spcPct val="0"/>
+              </a:spcBef>
+              <a:spcAft>
+                <a:spcPct val="0"/>
+              </a:spcAft>
+              <a:defRPr kumimoji="1">
+                <a:solidFill>
+                  <a:schemeClr val="tx1"/>
+                </a:solidFill>
+                <a:latin typeface="Tahoma" panose="020B0604030504040204" pitchFamily="34" charset="0"/>
+                <a:ea typeface="新細明體" panose="02020500000000000000" pitchFamily="18" charset="-120"/>
+              </a:defRPr>
+            </a:lvl8pPr>
+            <a:lvl9pPr marL="3886200" indent="-228600" eaLnBrk="0" fontAlgn="base" hangingPunct="0">
+              <a:spcBef>
+                <a:spcPct val="0"/>
+              </a:spcBef>
+              <a:spcAft>
+                <a:spcPct val="0"/>
+              </a:spcAft>
+              <a:defRPr kumimoji="1">
+                <a:solidFill>
+                  <a:schemeClr val="tx1"/>
+                </a:solidFill>
+                <a:latin typeface="Tahoma" panose="020B0604030504040204" pitchFamily="34" charset="0"/>
+                <a:ea typeface="新細明體" panose="02020500000000000000" pitchFamily="18" charset="-120"/>
+              </a:defRPr>
+            </a:lvl9pPr>
+          </a:lstStyle>
+          <a:p>
+            <a:fld id="{412C34E0-1A46-A243-934C-463288DE37EA}" type="slidenum">
+              <a:rPr kumimoji="0" lang="en-US" altLang="zh-TW"/>
+              <a:pPr/>
+              <a:t>42</a:t>
+            </a:fld>
+            <a:endParaRPr kumimoji="0" lang="en-US" altLang="zh-TW"/>
+          </a:p>
+        </p:txBody>
+      </p:sp>
+      <p:sp>
+        <p:nvSpPr>
+          <p:cNvPr id="29698" name="Rectangle 2">
+            <a:extLst>
+              <a:ext uri="{FF2B5EF4-FFF2-40B4-BE49-F238E27FC236}">
+                <a16:creationId xmlns:a16="http://schemas.microsoft.com/office/drawing/2014/main" id="{F68349DF-0129-0401-413D-657CF2E59E68}"/>
+              </a:ext>
+            </a:extLst>
+          </p:cNvPr>
+          <p:cNvSpPr>
+            <a:spLocks noGrp="1" noChangeArrowheads="1"/>
+          </p:cNvSpPr>
+          <p:nvPr>
+            <p:ph type="title"/>
+          </p:nvPr>
+        </p:nvSpPr>
+        <p:spPr/>
+        <p:txBody>
+          <a:bodyPr/>
+          <a:lstStyle/>
+          <a:p>
+            <a:pPr eaLnBrk="1" hangingPunct="1"/>
+            <a:r>
+              <a:rPr lang="zh-TW" altLang="en-US" dirty="0"/>
+              <a:t>郵寄問卷訪問（五）</a:t>
+            </a:r>
+          </a:p>
+        </p:txBody>
+      </p:sp>
+      <p:sp>
+        <p:nvSpPr>
+          <p:cNvPr id="29699" name="Rectangle 3">
+            <a:extLst>
+              <a:ext uri="{FF2B5EF4-FFF2-40B4-BE49-F238E27FC236}">
+                <a16:creationId xmlns:a16="http://schemas.microsoft.com/office/drawing/2014/main" id="{374EDABE-738F-F7CF-3F8B-3F7F1B579A26}"/>
+              </a:ext>
+            </a:extLst>
+          </p:cNvPr>
+          <p:cNvSpPr>
+            <a:spLocks noGrp="1" noChangeArrowheads="1"/>
+          </p:cNvSpPr>
+          <p:nvPr>
+            <p:ph type="body" idx="1"/>
+          </p:nvPr>
+        </p:nvSpPr>
+        <p:spPr/>
+        <p:txBody>
+          <a:bodyPr/>
+          <a:lstStyle/>
+          <a:p>
+            <a:pPr>
+              <a:lnSpc>
+                <a:spcPct val="150000"/>
+              </a:lnSpc>
+              <a:buFont typeface="Arial" panose="020B0604020202020204" pitchFamily="34" charset="0"/>
+              <a:buChar char="•"/>
+            </a:pPr>
+            <a:r>
+              <a:rPr lang="ja-JP" altLang="en-US" sz="2000"/>
+              <a:t>現代人對紙本信件的耐性極低，常被視為廣告垃圾信。回覆率若低於 </a:t>
+            </a:r>
+            <a:r>
+              <a:rPr lang="en-US" altLang="ja-JP" sz="2000" dirty="0"/>
+              <a:t>10-20%</a:t>
+            </a:r>
+            <a:r>
+              <a:rPr lang="ja-JP" altLang="en-US" sz="2000"/>
+              <a:t>，結果就難以代表母體。</a:t>
+            </a:r>
+          </a:p>
+          <a:p>
+            <a:pPr>
+              <a:lnSpc>
+                <a:spcPct val="150000"/>
+              </a:lnSpc>
+              <a:buFont typeface="Arial" panose="020B0604020202020204" pitchFamily="34" charset="0"/>
+              <a:buChar char="•"/>
+            </a:pPr>
+            <a:r>
+              <a:rPr lang="ja-JP" altLang="en-US" sz="2000"/>
+              <a:t>會回信的人通常具有特定特徵（如高教育程度、時間充裕的高齡者、或對該議題有極端情緒者）。這會導致無反應偏差。</a:t>
+            </a:r>
+            <a:endParaRPr lang="en-US" altLang="ja-JP" sz="2000" dirty="0"/>
+          </a:p>
+          <a:p>
+            <a:pPr>
+              <a:lnSpc>
+                <a:spcPct val="150000"/>
+              </a:lnSpc>
+              <a:buFont typeface="Arial" panose="020B0604020202020204" pitchFamily="34" charset="0"/>
+              <a:buChar char="•"/>
+            </a:pPr>
+            <a:endParaRPr lang="ja-JP" altLang="en-US" sz="2000"/>
+          </a:p>
+        </p:txBody>
+      </p:sp>
+    </p:spTree>
+    <p:extLst>
+      <p:ext uri="{BB962C8B-B14F-4D97-AF65-F5344CB8AC3E}">
+        <p14:creationId xmlns:p14="http://schemas.microsoft.com/office/powerpoint/2010/main" val="1255742156"/>
+      </p:ext>
+    </p:extLst>
+  </p:cSld>
+  <p:clrMapOvr>
+    <a:masterClrMapping/>
+  </p:clrMapOvr>
+</p:sld>
+</file>
+
+<file path=ppt/slides/slide43.xml><?xml version="1.0" encoding="utf-8"?>
+<p:sld xmlns:a="http://schemas.openxmlformats.org/drawingml/2006/main" xmlns:r="http://schemas.openxmlformats.org/officeDocument/2006/relationships" xmlns:p="http://schemas.openxmlformats.org/presentationml/2006/main">
+  <p:cSld>
+    <p:spTree>
+      <p:nvGrpSpPr>
         <p:cNvPr id="1" name=""/>
         <p:cNvGrpSpPr/>
         <p:nvPr/>
@@ -29033,7 +29899,7 @@
             <a:fld id="{781C4464-78F0-BF4F-9FA4-5C7489F72D34}" type="slidenum">
               <a:rPr kumimoji="0" lang="en-US" altLang="zh-TW"/>
               <a:pPr/>
-              <a:t>40</a:t>
+              <a:t>43</a:t>
             </a:fld>
             <a:endParaRPr kumimoji="0" lang="en-US" altLang="zh-TW"/>
           </a:p>
@@ -35837,667 +36703,6 @@
           </a:graphicData>
         </a:graphic>
       </p:graphicFrame>
-    </p:spTree>
-  </p:cSld>
-  <p:clrMapOvr>
-    <a:masterClrMapping/>
-  </p:clrMapOvr>
-</p:sld>
-</file>
-
-<file path=ppt/slides/slide41.xml><?xml version="1.0" encoding="utf-8"?>
-<p:sld xmlns:a="http://schemas.openxmlformats.org/drawingml/2006/main" xmlns:r="http://schemas.openxmlformats.org/officeDocument/2006/relationships" xmlns:p="http://schemas.openxmlformats.org/presentationml/2006/main">
-  <p:cSld>
-    <p:spTree>
-      <p:nvGrpSpPr>
-        <p:cNvPr id="1" name=""/>
-        <p:cNvGrpSpPr/>
-        <p:nvPr/>
-      </p:nvGrpSpPr>
-      <p:grpSpPr>
-        <a:xfrm>
-          <a:off x="0" y="0"/>
-          <a:ext cx="0" cy="0"/>
-          <a:chOff x="0" y="0"/>
-          <a:chExt cx="0" cy="0"/>
-        </a:xfrm>
-      </p:grpSpPr>
-      <p:sp>
-        <p:nvSpPr>
-          <p:cNvPr id="32769" name="Slide Number Placeholder 5">
-            <a:extLst>
-              <a:ext uri="{FF2B5EF4-FFF2-40B4-BE49-F238E27FC236}">
-                <a16:creationId xmlns:a16="http://schemas.microsoft.com/office/drawing/2014/main" id="{E3772F14-3B20-595E-87AC-5A05BAFFC303}"/>
-              </a:ext>
-            </a:extLst>
-          </p:cNvPr>
-          <p:cNvSpPr>
-            <a:spLocks noGrp="1"/>
-          </p:cNvSpPr>
-          <p:nvPr>
-            <p:ph type="sldNum" sz="quarter" idx="12"/>
-          </p:nvPr>
-        </p:nvSpPr>
-        <p:spPr>
-          <a:noFill/>
-          <a:extLst>
-            <a:ext uri="{909E8E84-426E-40DD-AFC4-6F175D3DCCD1}">
-              <a14:hiddenFill xmlns:a14="http://schemas.microsoft.com/office/drawing/2010/main">
-                <a:solidFill>
-                  <a:schemeClr val="accent1"/>
-                </a:solidFill>
-              </a14:hiddenFill>
-            </a:ext>
-            <a:ext uri="{91240B29-F687-4F45-9708-019B960494DF}">
-              <a14:hiddenLine xmlns:a14="http://schemas.microsoft.com/office/drawing/2010/main" w="9525">
-                <a:solidFill>
-                  <a:schemeClr val="tx1"/>
-                </a:solidFill>
-                <a:miter lim="800000"/>
-                <a:headEnd/>
-                <a:tailEnd/>
-              </a14:hiddenLine>
-            </a:ext>
-            <a:ext uri="{AF507438-7753-43E0-B8FC-AC1667EBCBE1}">
-              <a14:hiddenEffects xmlns:a14="http://schemas.microsoft.com/office/drawing/2010/main">
-                <a:effectLst>
-                  <a:outerShdw dist="35921" dir="2700000" algn="ctr" rotWithShape="0">
-                    <a:schemeClr val="bg2"/>
-                  </a:outerShdw>
-                </a:effectLst>
-              </a14:hiddenEffects>
-            </a:ext>
-          </a:extLst>
-        </p:spPr>
-        <p:txBody>
-          <a:bodyPr/>
-          <a:lstStyle>
-            <a:lvl1pPr>
-              <a:defRPr kumimoji="1">
-                <a:solidFill>
-                  <a:schemeClr val="tx1"/>
-                </a:solidFill>
-                <a:latin typeface="Tahoma" panose="020B0604030504040204" pitchFamily="34" charset="0"/>
-                <a:ea typeface="新細明體" panose="02020500000000000000" pitchFamily="18" charset="-120"/>
-              </a:defRPr>
-            </a:lvl1pPr>
-            <a:lvl2pPr marL="742950" indent="-285750">
-              <a:defRPr kumimoji="1">
-                <a:solidFill>
-                  <a:schemeClr val="tx1"/>
-                </a:solidFill>
-                <a:latin typeface="Tahoma" panose="020B0604030504040204" pitchFamily="34" charset="0"/>
-                <a:ea typeface="新細明體" panose="02020500000000000000" pitchFamily="18" charset="-120"/>
-              </a:defRPr>
-            </a:lvl2pPr>
-            <a:lvl3pPr marL="1143000" indent="-228600">
-              <a:defRPr kumimoji="1">
-                <a:solidFill>
-                  <a:schemeClr val="tx1"/>
-                </a:solidFill>
-                <a:latin typeface="Tahoma" panose="020B0604030504040204" pitchFamily="34" charset="0"/>
-                <a:ea typeface="新細明體" panose="02020500000000000000" pitchFamily="18" charset="-120"/>
-              </a:defRPr>
-            </a:lvl3pPr>
-            <a:lvl4pPr marL="1600200" indent="-228600">
-              <a:defRPr kumimoji="1">
-                <a:solidFill>
-                  <a:schemeClr val="tx1"/>
-                </a:solidFill>
-                <a:latin typeface="Tahoma" panose="020B0604030504040204" pitchFamily="34" charset="0"/>
-                <a:ea typeface="新細明體" panose="02020500000000000000" pitchFamily="18" charset="-120"/>
-              </a:defRPr>
-            </a:lvl4pPr>
-            <a:lvl5pPr marL="2057400" indent="-228600">
-              <a:defRPr kumimoji="1">
-                <a:solidFill>
-                  <a:schemeClr val="tx1"/>
-                </a:solidFill>
-                <a:latin typeface="Tahoma" panose="020B0604030504040204" pitchFamily="34" charset="0"/>
-                <a:ea typeface="新細明體" panose="02020500000000000000" pitchFamily="18" charset="-120"/>
-              </a:defRPr>
-            </a:lvl5pPr>
-            <a:lvl6pPr marL="2514600" indent="-228600" eaLnBrk="0" fontAlgn="base" hangingPunct="0">
-              <a:spcBef>
-                <a:spcPct val="0"/>
-              </a:spcBef>
-              <a:spcAft>
-                <a:spcPct val="0"/>
-              </a:spcAft>
-              <a:defRPr kumimoji="1">
-                <a:solidFill>
-                  <a:schemeClr val="tx1"/>
-                </a:solidFill>
-                <a:latin typeface="Tahoma" panose="020B0604030504040204" pitchFamily="34" charset="0"/>
-                <a:ea typeface="新細明體" panose="02020500000000000000" pitchFamily="18" charset="-120"/>
-              </a:defRPr>
-            </a:lvl6pPr>
-            <a:lvl7pPr marL="2971800" indent="-228600" eaLnBrk="0" fontAlgn="base" hangingPunct="0">
-              <a:spcBef>
-                <a:spcPct val="0"/>
-              </a:spcBef>
-              <a:spcAft>
-                <a:spcPct val="0"/>
-              </a:spcAft>
-              <a:defRPr kumimoji="1">
-                <a:solidFill>
-                  <a:schemeClr val="tx1"/>
-                </a:solidFill>
-                <a:latin typeface="Tahoma" panose="020B0604030504040204" pitchFamily="34" charset="0"/>
-                <a:ea typeface="新細明體" panose="02020500000000000000" pitchFamily="18" charset="-120"/>
-              </a:defRPr>
-            </a:lvl7pPr>
-            <a:lvl8pPr marL="3429000" indent="-228600" eaLnBrk="0" fontAlgn="base" hangingPunct="0">
-              <a:spcBef>
-                <a:spcPct val="0"/>
-              </a:spcBef>
-              <a:spcAft>
-                <a:spcPct val="0"/>
-              </a:spcAft>
-              <a:defRPr kumimoji="1">
-                <a:solidFill>
-                  <a:schemeClr val="tx1"/>
-                </a:solidFill>
-                <a:latin typeface="Tahoma" panose="020B0604030504040204" pitchFamily="34" charset="0"/>
-                <a:ea typeface="新細明體" panose="02020500000000000000" pitchFamily="18" charset="-120"/>
-              </a:defRPr>
-            </a:lvl8pPr>
-            <a:lvl9pPr marL="3886200" indent="-228600" eaLnBrk="0" fontAlgn="base" hangingPunct="0">
-              <a:spcBef>
-                <a:spcPct val="0"/>
-              </a:spcBef>
-              <a:spcAft>
-                <a:spcPct val="0"/>
-              </a:spcAft>
-              <a:defRPr kumimoji="1">
-                <a:solidFill>
-                  <a:schemeClr val="tx1"/>
-                </a:solidFill>
-                <a:latin typeface="Tahoma" panose="020B0604030504040204" pitchFamily="34" charset="0"/>
-                <a:ea typeface="新細明體" panose="02020500000000000000" pitchFamily="18" charset="-120"/>
-              </a:defRPr>
-            </a:lvl9pPr>
-          </a:lstStyle>
-          <a:p>
-            <a:fld id="{1CC738DC-9947-2B44-B570-1965E3A7A033}" type="slidenum">
-              <a:rPr kumimoji="0" lang="en-US" altLang="zh-TW"/>
-              <a:pPr/>
-              <a:t>41</a:t>
-            </a:fld>
-            <a:endParaRPr kumimoji="0" lang="en-US" altLang="zh-TW"/>
-          </a:p>
-        </p:txBody>
-      </p:sp>
-      <p:sp>
-        <p:nvSpPr>
-          <p:cNvPr id="32770" name="Rectangle 2">
-            <a:extLst>
-              <a:ext uri="{FF2B5EF4-FFF2-40B4-BE49-F238E27FC236}">
-                <a16:creationId xmlns:a16="http://schemas.microsoft.com/office/drawing/2014/main" id="{D2789234-44FB-F99F-7466-4EB3F8D5356F}"/>
-              </a:ext>
-            </a:extLst>
-          </p:cNvPr>
-          <p:cNvSpPr>
-            <a:spLocks noGrp="1" noChangeArrowheads="1"/>
-          </p:cNvSpPr>
-          <p:nvPr>
-            <p:ph type="title"/>
-          </p:nvPr>
-        </p:nvSpPr>
-        <p:spPr/>
-        <p:txBody>
-          <a:bodyPr/>
-          <a:lstStyle/>
-          <a:p>
-            <a:pPr eaLnBrk="1" hangingPunct="1"/>
-            <a:r>
-              <a:rPr lang="zh-TW" altLang="en-US"/>
-              <a:t>調查應用</a:t>
-            </a:r>
-          </a:p>
-        </p:txBody>
-      </p:sp>
-      <p:sp>
-        <p:nvSpPr>
-          <p:cNvPr id="32771" name="Rectangle 3">
-            <a:extLst>
-              <a:ext uri="{FF2B5EF4-FFF2-40B4-BE49-F238E27FC236}">
-                <a16:creationId xmlns:a16="http://schemas.microsoft.com/office/drawing/2014/main" id="{DB13C07C-27A5-749F-4FFA-D9A5EC7FF9D6}"/>
-              </a:ext>
-            </a:extLst>
-          </p:cNvPr>
-          <p:cNvSpPr>
-            <a:spLocks noGrp="1" noChangeArrowheads="1"/>
-          </p:cNvSpPr>
-          <p:nvPr>
-            <p:ph type="body" idx="1"/>
-          </p:nvPr>
-        </p:nvSpPr>
-        <p:spPr/>
-        <p:txBody>
-          <a:bodyPr/>
-          <a:lstStyle/>
-          <a:p>
-            <a:pPr eaLnBrk="1" hangingPunct="1"/>
-            <a:r>
-              <a:rPr lang="zh-TW" altLang="en-US" dirty="0">
-                <a:latin typeface="新細明體" panose="02020500000000000000" pitchFamily="18" charset="-120"/>
-              </a:rPr>
-              <a:t>民意調查</a:t>
-            </a:r>
-            <a:r>
-              <a:rPr lang="en-US" altLang="zh-TW" dirty="0">
-                <a:latin typeface="新細明體" panose="02020500000000000000" pitchFamily="18" charset="-120"/>
-              </a:rPr>
-              <a:t>---</a:t>
-            </a:r>
-            <a:r>
-              <a:rPr lang="zh-TW" altLang="en-US" dirty="0">
-                <a:latin typeface="新細明體" panose="02020500000000000000" pitchFamily="18" charset="-120"/>
-              </a:rPr>
-              <a:t>選舉，施政滿意度</a:t>
-            </a:r>
-          </a:p>
-          <a:p>
-            <a:pPr eaLnBrk="1" hangingPunct="1"/>
-            <a:r>
-              <a:rPr lang="zh-TW" altLang="en-US" dirty="0">
-                <a:latin typeface="新細明體" panose="02020500000000000000" pitchFamily="18" charset="-120"/>
-              </a:rPr>
-              <a:t>政府調查</a:t>
-            </a:r>
-          </a:p>
-          <a:p>
-            <a:pPr eaLnBrk="1" hangingPunct="1"/>
-            <a:r>
-              <a:rPr lang="zh-TW" altLang="en-US" dirty="0">
-                <a:latin typeface="新細明體" panose="02020500000000000000" pitchFamily="18" charset="-120"/>
-              </a:rPr>
-              <a:t>市場調查</a:t>
-            </a:r>
-          </a:p>
-          <a:p>
-            <a:pPr eaLnBrk="1" hangingPunct="1"/>
-            <a:r>
-              <a:rPr lang="zh-TW" altLang="en-US" dirty="0">
-                <a:latin typeface="新細明體" panose="02020500000000000000" pitchFamily="18" charset="-120"/>
-              </a:rPr>
-              <a:t>特定人調查</a:t>
-            </a:r>
-            <a:r>
-              <a:rPr lang="en-US" altLang="zh-TW" dirty="0">
-                <a:latin typeface="新細明體" panose="02020500000000000000" pitchFamily="18" charset="-120"/>
-              </a:rPr>
-              <a:t>---</a:t>
-            </a:r>
-            <a:r>
-              <a:rPr lang="zh-TW" altLang="en-US" dirty="0">
-                <a:latin typeface="新細明體" panose="02020500000000000000" pitchFamily="18" charset="-120"/>
-              </a:rPr>
-              <a:t>企業主，職場上班族，學生等等</a:t>
-            </a:r>
-          </a:p>
-          <a:p>
-            <a:pPr eaLnBrk="1" hangingPunct="1"/>
-            <a:r>
-              <a:rPr lang="zh-TW" altLang="en-US" dirty="0">
-                <a:latin typeface="新細明體" panose="02020500000000000000" pitchFamily="18" charset="-120"/>
-              </a:rPr>
-              <a:t> 學術調查</a:t>
-            </a:r>
-            <a:r>
-              <a:rPr lang="en-US" altLang="zh-TW" dirty="0">
-                <a:latin typeface="新細明體" panose="02020500000000000000" pitchFamily="18" charset="-120"/>
-              </a:rPr>
-              <a:t>---</a:t>
-            </a:r>
-            <a:r>
-              <a:rPr lang="en-US" altLang="zh-TW" dirty="0">
-                <a:latin typeface="新細明體" panose="02020500000000000000" pitchFamily="18" charset="-120"/>
-                <a:hlinkClick r:id="rId2"/>
-              </a:rPr>
-              <a:t>TEDS</a:t>
-            </a:r>
-            <a:endParaRPr lang="en-US" altLang="zh-TW" dirty="0">
-              <a:latin typeface="新細明體" panose="02020500000000000000" pitchFamily="18" charset="-120"/>
-            </a:endParaRPr>
-          </a:p>
-        </p:txBody>
-      </p:sp>
-    </p:spTree>
-  </p:cSld>
-  <p:clrMapOvr>
-    <a:masterClrMapping/>
-  </p:clrMapOvr>
-</p:sld>
-</file>
-
-<file path=ppt/slides/slide42.xml><?xml version="1.0" encoding="utf-8"?>
-<p:sld xmlns:a="http://schemas.openxmlformats.org/drawingml/2006/main" xmlns:r="http://schemas.openxmlformats.org/officeDocument/2006/relationships" xmlns:p="http://schemas.openxmlformats.org/presentationml/2006/main">
-  <p:cSld>
-    <p:spTree>
-      <p:nvGrpSpPr>
-        <p:cNvPr id="1" name=""/>
-        <p:cNvGrpSpPr/>
-        <p:nvPr/>
-      </p:nvGrpSpPr>
-      <p:grpSpPr>
-        <a:xfrm>
-          <a:off x="0" y="0"/>
-          <a:ext cx="0" cy="0"/>
-          <a:chOff x="0" y="0"/>
-          <a:chExt cx="0" cy="0"/>
-        </a:xfrm>
-      </p:grpSpPr>
-      <p:sp>
-        <p:nvSpPr>
-          <p:cNvPr id="33793" name="Slide Number Placeholder 5">
-            <a:extLst>
-              <a:ext uri="{FF2B5EF4-FFF2-40B4-BE49-F238E27FC236}">
-                <a16:creationId xmlns:a16="http://schemas.microsoft.com/office/drawing/2014/main" id="{65FFFB06-2E9B-AD63-E0FA-371C3C3C7AF3}"/>
-              </a:ext>
-            </a:extLst>
-          </p:cNvPr>
-          <p:cNvSpPr>
-            <a:spLocks noGrp="1"/>
-          </p:cNvSpPr>
-          <p:nvPr>
-            <p:ph type="sldNum" sz="quarter" idx="12"/>
-          </p:nvPr>
-        </p:nvSpPr>
-        <p:spPr>
-          <a:noFill/>
-          <a:extLst>
-            <a:ext uri="{909E8E84-426E-40DD-AFC4-6F175D3DCCD1}">
-              <a14:hiddenFill xmlns:a14="http://schemas.microsoft.com/office/drawing/2010/main">
-                <a:solidFill>
-                  <a:schemeClr val="accent1"/>
-                </a:solidFill>
-              </a14:hiddenFill>
-            </a:ext>
-            <a:ext uri="{91240B29-F687-4F45-9708-019B960494DF}">
-              <a14:hiddenLine xmlns:a14="http://schemas.microsoft.com/office/drawing/2010/main" w="9525">
-                <a:solidFill>
-                  <a:schemeClr val="tx1"/>
-                </a:solidFill>
-                <a:miter lim="800000"/>
-                <a:headEnd/>
-                <a:tailEnd/>
-              </a14:hiddenLine>
-            </a:ext>
-            <a:ext uri="{AF507438-7753-43E0-B8FC-AC1667EBCBE1}">
-              <a14:hiddenEffects xmlns:a14="http://schemas.microsoft.com/office/drawing/2010/main">
-                <a:effectLst>
-                  <a:outerShdw dist="35921" dir="2700000" algn="ctr" rotWithShape="0">
-                    <a:schemeClr val="bg2"/>
-                  </a:outerShdw>
-                </a:effectLst>
-              </a14:hiddenEffects>
-            </a:ext>
-          </a:extLst>
-        </p:spPr>
-        <p:txBody>
-          <a:bodyPr/>
-          <a:lstStyle>
-            <a:lvl1pPr>
-              <a:defRPr kumimoji="1">
-                <a:solidFill>
-                  <a:schemeClr val="tx1"/>
-                </a:solidFill>
-                <a:latin typeface="Tahoma" panose="020B0604030504040204" pitchFamily="34" charset="0"/>
-                <a:ea typeface="新細明體" panose="02020500000000000000" pitchFamily="18" charset="-120"/>
-              </a:defRPr>
-            </a:lvl1pPr>
-            <a:lvl2pPr marL="742950" indent="-285750">
-              <a:defRPr kumimoji="1">
-                <a:solidFill>
-                  <a:schemeClr val="tx1"/>
-                </a:solidFill>
-                <a:latin typeface="Tahoma" panose="020B0604030504040204" pitchFamily="34" charset="0"/>
-                <a:ea typeface="新細明體" panose="02020500000000000000" pitchFamily="18" charset="-120"/>
-              </a:defRPr>
-            </a:lvl2pPr>
-            <a:lvl3pPr marL="1143000" indent="-228600">
-              <a:defRPr kumimoji="1">
-                <a:solidFill>
-                  <a:schemeClr val="tx1"/>
-                </a:solidFill>
-                <a:latin typeface="Tahoma" panose="020B0604030504040204" pitchFamily="34" charset="0"/>
-                <a:ea typeface="新細明體" panose="02020500000000000000" pitchFamily="18" charset="-120"/>
-              </a:defRPr>
-            </a:lvl3pPr>
-            <a:lvl4pPr marL="1600200" indent="-228600">
-              <a:defRPr kumimoji="1">
-                <a:solidFill>
-                  <a:schemeClr val="tx1"/>
-                </a:solidFill>
-                <a:latin typeface="Tahoma" panose="020B0604030504040204" pitchFamily="34" charset="0"/>
-                <a:ea typeface="新細明體" panose="02020500000000000000" pitchFamily="18" charset="-120"/>
-              </a:defRPr>
-            </a:lvl4pPr>
-            <a:lvl5pPr marL="2057400" indent="-228600">
-              <a:defRPr kumimoji="1">
-                <a:solidFill>
-                  <a:schemeClr val="tx1"/>
-                </a:solidFill>
-                <a:latin typeface="Tahoma" panose="020B0604030504040204" pitchFamily="34" charset="0"/>
-                <a:ea typeface="新細明體" panose="02020500000000000000" pitchFamily="18" charset="-120"/>
-              </a:defRPr>
-            </a:lvl5pPr>
-            <a:lvl6pPr marL="2514600" indent="-228600" eaLnBrk="0" fontAlgn="base" hangingPunct="0">
-              <a:spcBef>
-                <a:spcPct val="0"/>
-              </a:spcBef>
-              <a:spcAft>
-                <a:spcPct val="0"/>
-              </a:spcAft>
-              <a:defRPr kumimoji="1">
-                <a:solidFill>
-                  <a:schemeClr val="tx1"/>
-                </a:solidFill>
-                <a:latin typeface="Tahoma" panose="020B0604030504040204" pitchFamily="34" charset="0"/>
-                <a:ea typeface="新細明體" panose="02020500000000000000" pitchFamily="18" charset="-120"/>
-              </a:defRPr>
-            </a:lvl6pPr>
-            <a:lvl7pPr marL="2971800" indent="-228600" eaLnBrk="0" fontAlgn="base" hangingPunct="0">
-              <a:spcBef>
-                <a:spcPct val="0"/>
-              </a:spcBef>
-              <a:spcAft>
-                <a:spcPct val="0"/>
-              </a:spcAft>
-              <a:defRPr kumimoji="1">
-                <a:solidFill>
-                  <a:schemeClr val="tx1"/>
-                </a:solidFill>
-                <a:latin typeface="Tahoma" panose="020B0604030504040204" pitchFamily="34" charset="0"/>
-                <a:ea typeface="新細明體" panose="02020500000000000000" pitchFamily="18" charset="-120"/>
-              </a:defRPr>
-            </a:lvl7pPr>
-            <a:lvl8pPr marL="3429000" indent="-228600" eaLnBrk="0" fontAlgn="base" hangingPunct="0">
-              <a:spcBef>
-                <a:spcPct val="0"/>
-              </a:spcBef>
-              <a:spcAft>
-                <a:spcPct val="0"/>
-              </a:spcAft>
-              <a:defRPr kumimoji="1">
-                <a:solidFill>
-                  <a:schemeClr val="tx1"/>
-                </a:solidFill>
-                <a:latin typeface="Tahoma" panose="020B0604030504040204" pitchFamily="34" charset="0"/>
-                <a:ea typeface="新細明體" panose="02020500000000000000" pitchFamily="18" charset="-120"/>
-              </a:defRPr>
-            </a:lvl8pPr>
-            <a:lvl9pPr marL="3886200" indent="-228600" eaLnBrk="0" fontAlgn="base" hangingPunct="0">
-              <a:spcBef>
-                <a:spcPct val="0"/>
-              </a:spcBef>
-              <a:spcAft>
-                <a:spcPct val="0"/>
-              </a:spcAft>
-              <a:defRPr kumimoji="1">
-                <a:solidFill>
-                  <a:schemeClr val="tx1"/>
-                </a:solidFill>
-                <a:latin typeface="Tahoma" panose="020B0604030504040204" pitchFamily="34" charset="0"/>
-                <a:ea typeface="新細明體" panose="02020500000000000000" pitchFamily="18" charset="-120"/>
-              </a:defRPr>
-            </a:lvl9pPr>
-          </a:lstStyle>
-          <a:p>
-            <a:fld id="{97055B51-C713-8D4E-AFD7-CAA4698D6BA8}" type="slidenum">
-              <a:rPr kumimoji="0" lang="en-US" altLang="zh-TW"/>
-              <a:pPr/>
-              <a:t>42</a:t>
-            </a:fld>
-            <a:endParaRPr kumimoji="0" lang="en-US" altLang="zh-TW"/>
-          </a:p>
-        </p:txBody>
-      </p:sp>
-      <p:sp>
-        <p:nvSpPr>
-          <p:cNvPr id="33794" name="Rectangle 2">
-            <a:extLst>
-              <a:ext uri="{FF2B5EF4-FFF2-40B4-BE49-F238E27FC236}">
-                <a16:creationId xmlns:a16="http://schemas.microsoft.com/office/drawing/2014/main" id="{1157659F-2908-6FD5-BC53-5E396ABD8843}"/>
-              </a:ext>
-            </a:extLst>
-          </p:cNvPr>
-          <p:cNvSpPr>
-            <a:spLocks noGrp="1" noChangeArrowheads="1"/>
-          </p:cNvSpPr>
-          <p:nvPr>
-            <p:ph type="title"/>
-          </p:nvPr>
-        </p:nvSpPr>
-        <p:spPr/>
-        <p:txBody>
-          <a:bodyPr/>
-          <a:lstStyle/>
-          <a:p>
-            <a:pPr eaLnBrk="1" hangingPunct="1"/>
-            <a:r>
-              <a:rPr lang="zh-TW" altLang="en-US"/>
-              <a:t>調查倫理</a:t>
-            </a:r>
-          </a:p>
-        </p:txBody>
-      </p:sp>
-      <p:sp>
-        <p:nvSpPr>
-          <p:cNvPr id="33795" name="Rectangle 3">
-            <a:extLst>
-              <a:ext uri="{FF2B5EF4-FFF2-40B4-BE49-F238E27FC236}">
-                <a16:creationId xmlns:a16="http://schemas.microsoft.com/office/drawing/2014/main" id="{A673E81B-D117-2012-C9B1-F9392AAE3F8F}"/>
-              </a:ext>
-            </a:extLst>
-          </p:cNvPr>
-          <p:cNvSpPr>
-            <a:spLocks noGrp="1" noChangeArrowheads="1"/>
-          </p:cNvSpPr>
-          <p:nvPr>
-            <p:ph type="body" idx="1"/>
-          </p:nvPr>
-        </p:nvSpPr>
-        <p:spPr/>
-        <p:txBody>
-          <a:bodyPr/>
-          <a:lstStyle/>
-          <a:p>
-            <a:pPr eaLnBrk="1" hangingPunct="1"/>
-            <a:r>
-              <a:rPr lang="zh-TW" altLang="en-US" dirty="0">
-                <a:solidFill>
-                  <a:schemeClr val="tx2"/>
-                </a:solidFill>
-                <a:latin typeface="新細明體" panose="02020500000000000000" pitchFamily="18" charset="-120"/>
-              </a:rPr>
-              <a:t>不得連結受訪者個人資料與回答內容</a:t>
-            </a:r>
-          </a:p>
-          <a:p>
-            <a:pPr eaLnBrk="1" hangingPunct="1"/>
-            <a:r>
-              <a:rPr lang="zh-TW" altLang="en-US" dirty="0">
-                <a:solidFill>
-                  <a:schemeClr val="tx2"/>
-                </a:solidFill>
-                <a:latin typeface="新細明體" panose="02020500000000000000" pitchFamily="18" charset="-120"/>
-              </a:rPr>
-              <a:t>不得提供資料給其他單位再度訪問</a:t>
-            </a:r>
-          </a:p>
-          <a:p>
-            <a:pPr eaLnBrk="1" hangingPunct="1"/>
-            <a:r>
-              <a:rPr lang="zh-TW" altLang="en-US" dirty="0">
-                <a:solidFill>
-                  <a:schemeClr val="tx2"/>
-                </a:solidFill>
-                <a:latin typeface="新細明體" panose="02020500000000000000" pitchFamily="18" charset="-120"/>
-              </a:rPr>
-              <a:t>盡量不要打擾受訪者</a:t>
-            </a:r>
-            <a:r>
-              <a:rPr lang="en-US" altLang="zh-TW" dirty="0">
-                <a:latin typeface="新細明體" panose="02020500000000000000" pitchFamily="18" charset="-120"/>
-              </a:rPr>
-              <a:t>---</a:t>
-            </a:r>
-            <a:r>
-              <a:rPr lang="zh-TW" altLang="en-US" dirty="0">
-                <a:latin typeface="新細明體" panose="02020500000000000000" pitchFamily="18" charset="-120"/>
-              </a:rPr>
-              <a:t>晚間十點半以後</a:t>
-            </a:r>
-          </a:p>
-          <a:p>
-            <a:pPr eaLnBrk="1" hangingPunct="1"/>
-            <a:r>
-              <a:rPr lang="zh-TW" altLang="en-US" dirty="0">
-                <a:solidFill>
-                  <a:schemeClr val="tx2"/>
-                </a:solidFill>
-                <a:latin typeface="新細明體" panose="02020500000000000000" pitchFamily="18" charset="-120"/>
-              </a:rPr>
-              <a:t>公布結果時需要公布所有資訊</a:t>
-            </a:r>
-            <a:r>
-              <a:rPr lang="en-US" altLang="zh-TW" dirty="0">
-                <a:latin typeface="新細明體" panose="02020500000000000000" pitchFamily="18" charset="-120"/>
-              </a:rPr>
-              <a:t>---</a:t>
-            </a:r>
-            <a:r>
-              <a:rPr lang="zh-TW" altLang="en-US" dirty="0">
-                <a:latin typeface="新細明體" panose="02020500000000000000" pitchFamily="18" charset="-120"/>
-              </a:rPr>
-              <a:t>成功樣本數，進行時間 ，抽樣方法 ，抽樣誤差，完整題目等等</a:t>
-            </a:r>
-            <a:r>
-              <a:rPr lang="en-US" altLang="zh-TW" dirty="0">
-                <a:latin typeface="新細明體" panose="02020500000000000000" pitchFamily="18" charset="-120"/>
-              </a:rPr>
-              <a:t>(</a:t>
-            </a:r>
-            <a:r>
-              <a:rPr lang="zh-TW" altLang="en-US" dirty="0">
-                <a:latin typeface="新細明體" panose="02020500000000000000" pitchFamily="18" charset="-120"/>
-                <a:hlinkClick r:id="rId2"/>
-              </a:rPr>
-              <a:t>公職人員選罷法</a:t>
-            </a:r>
-            <a:r>
-              <a:rPr lang="en-US" altLang="zh-TW">
-                <a:latin typeface="新細明體" panose="02020500000000000000" pitchFamily="18" charset="-120"/>
-              </a:rPr>
-              <a:t>)</a:t>
-            </a:r>
-            <a:endParaRPr lang="en-US" altLang="zh-TW"/>
-          </a:p>
-        </p:txBody>
-      </p:sp>
     </p:spTree>
   </p:cSld>
   <p:clrMapOvr>
@@ -37367,7 +37572,7 @@
             </a:pPr>
             <a:r>
               <a:rPr lang="zh-TW" altLang="en-US" sz="2000" dirty="0"/>
-              <a:t>面對面訪問的優點是與受訪者面對面接觸，以最寬鬆的成功率定義，成功樣本數除以全部接觸到的樣本數，比起其他訪問方式來得低。</a:t>
+              <a:t>面對面訪問的優點是與受訪者面對面接觸，以最寬鬆的成功率定義，成功樣本數除以全部接觸到的樣本數，比起其他訪問方式來得高。</a:t>
             </a:r>
             <a:endParaRPr lang="en-US" altLang="zh-TW" sz="2000" dirty="0"/>
           </a:p>
